--- a/Revised_Poster Presentation Template_FST 5 1 (1).pptx
+++ b/Revised_Poster Presentation Template_FST 5 1 (1).pptx
@@ -5,7 +5,7 @@
     <p:sldMasterId id="2147483672" r:id="rId1"/>
   </p:sldMasterIdLst>
   <p:sldIdLst>
-    <p:sldId id="301" r:id="rId2"/>
+    <p:sldId id="304" r:id="rId2"/>
   </p:sldIdLst>
   <p:sldSz cx="27432000" cy="43891200"/>
   <p:notesSz cx="6858000" cy="9144000"/>
@@ -183,7 +183,7 @@
               <a:lstStyle/>
               <a:p>
                 <a:pPr>
-                  <a:defRPr sz="2000" b="1">
+                  <a:defRPr sz="2200" b="1">
                     <a:solidFill>
                       <a:srgbClr val="1E2A32"/>
                     </a:solidFill>
@@ -330,7 +330,7 @@
           <a:lstStyle/>
           <a:p>
             <a:pPr>
-              <a:defRPr sz="2000" b="0">
+              <a:defRPr sz="2200" b="0">
                 <a:solidFill>
                   <a:srgbClr val="1E2A32"/>
                 </a:solidFill>
@@ -454,7 +454,7 @@
               <a:lstStyle/>
               <a:p>
                 <a:pPr>
-                  <a:defRPr sz="2000" b="1">
+                  <a:defRPr sz="2200" b="1">
                     <a:solidFill>
                       <a:srgbClr val="1E2A32"/>
                     </a:solidFill>
@@ -571,7 +571,7 @@
           <a:lstStyle/>
           <a:p>
             <a:pPr>
-              <a:defRPr sz="2000" b="0">
+              <a:defRPr sz="2200" b="0">
                 <a:solidFill>
                   <a:srgbClr val="1E2A32"/>
                 </a:solidFill>
@@ -696,7 +696,7 @@
               <a:lstStyle/>
               <a:p>
                 <a:pPr>
-                  <a:defRPr sz="2000" b="1">
+                  <a:defRPr sz="2200" b="1">
                     <a:solidFill>
                       <a:srgbClr val="1E2A32"/>
                     </a:solidFill>
@@ -849,7 +849,7 @@
           <a:lstStyle/>
           <a:p>
             <a:pPr>
-              <a:defRPr sz="2000" b="0">
+              <a:defRPr sz="2200" b="0">
                 <a:solidFill>
                   <a:srgbClr val="1E2A32"/>
                 </a:solidFill>
@@ -973,7 +973,7 @@
               <a:lstStyle/>
               <a:p>
                 <a:pPr>
-                  <a:defRPr sz="2000" b="1">
+                  <a:defRPr sz="2200" b="1">
                     <a:solidFill>
                       <a:srgbClr val="1E2A32"/>
                     </a:solidFill>
@@ -1102,7 +1102,7 @@
           <a:lstStyle/>
           <a:p>
             <a:pPr>
-              <a:defRPr sz="2000" b="0">
+              <a:defRPr sz="2200" b="0">
                 <a:solidFill>
                   <a:srgbClr val="1E2A32"/>
                 </a:solidFill>
@@ -4288,7 +4288,7 @@
           <a:lstStyle/>
           <a:p>
             <a:pPr algn="ctr"/>
-            <a:endParaRPr lang="en-US" sz="1500" dirty="0"/>
+            <a:endParaRPr lang="en-US" sz="2200" dirty="0"/>
           </a:p>
         </p:txBody>
       </p:sp>
@@ -4309,7 +4309,7 @@
         <p:spPr>
           <a:xfrm>
             <a:off x="609600" y="355600"/>
-            <a:ext cx="22733000" cy="990600"/>
+            <a:ext cx="22733000" cy="830997"/>
           </a:xfrm>
           <a:prstGeom prst="rect">
             <a:avLst/>
@@ -4318,7 +4318,7 @@
         </p:spPr>
         <p:txBody>
           <a:bodyPr wrap="square" lIns="114300" tIns="0" rIns="114300" bIns="0" anchor="t">
-            <a:noAutofit/>
+            <a:spAutoFit/>
           </a:bodyPr>
           <a:lstStyle/>
           <a:p>
@@ -4360,7 +4360,7 @@
         <p:spPr>
           <a:xfrm>
             <a:off x="609600" y="1397000"/>
-            <a:ext cx="22733000" cy="584200"/>
+            <a:ext cx="22733000" cy="492443"/>
           </a:xfrm>
           <a:prstGeom prst="rect">
             <a:avLst/>
@@ -4369,7 +4369,7 @@
         </p:spPr>
         <p:txBody>
           <a:bodyPr wrap="square" lIns="114300" tIns="0" rIns="114300" bIns="0" anchor="t">
-            <a:noAutofit/>
+            <a:spAutoFit/>
           </a:bodyPr>
           <a:lstStyle/>
           <a:p>
@@ -4411,7 +4411,7 @@
         <p:spPr>
           <a:xfrm>
             <a:off x="609600" y="2235200"/>
-            <a:ext cx="22733000" cy="457200"/>
+            <a:ext cx="22733000" cy="353943"/>
           </a:xfrm>
           <a:prstGeom prst="rect">
             <a:avLst/>
@@ -4420,7 +4420,7 @@
         </p:spPr>
         <p:txBody>
           <a:bodyPr wrap="square" lIns="114300" tIns="0" rIns="114300" bIns="0" anchor="t">
-            <a:noAutofit/>
+            <a:spAutoFit/>
           </a:bodyPr>
           <a:lstStyle/>
           <a:p>
@@ -4495,7 +4495,7 @@
           <a:lstStyle/>
           <a:p>
             <a:pPr algn="ctr"/>
-            <a:endParaRPr lang="en-US" sz="1500" dirty="0"/>
+            <a:endParaRPr lang="en-US" sz="2200" dirty="0"/>
           </a:p>
         </p:txBody>
       </p:sp>
@@ -4541,7 +4541,7 @@
               </a:spcAft>
             </a:pPr>
             <a:r>
-              <a:rPr lang="en-US" sz="1800" b="0" i="0" dirty="0">
+              <a:rPr lang="en-US" sz="2200" b="0" i="0" dirty="0">
                 <a:solidFill>
                   <a:srgbClr val="FFFFFF"/>
                 </a:solidFill>
@@ -4609,7 +4609,7 @@
         <p:spPr>
           <a:xfrm>
             <a:off x="609600" y="2895600"/>
-            <a:ext cx="22733000" cy="406400"/>
+            <a:ext cx="22733000" cy="338554"/>
           </a:xfrm>
           <a:prstGeom prst="rect">
             <a:avLst/>
@@ -4618,12 +4618,12 @@
         </p:spPr>
         <p:txBody>
           <a:bodyPr wrap="square" lIns="114300" tIns="0" rIns="0" bIns="0">
-            <a:noAutofit/>
+            <a:spAutoFit/>
           </a:bodyPr>
           <a:lstStyle/>
           <a:p>
             <a:r>
-              <a:rPr lang="en-US" sz="2000" b="0" i="0" dirty="0">
+              <a:rPr lang="en-US" sz="2200" b="0" i="0" dirty="0">
                 <a:solidFill>
                   <a:srgbClr val="9DB4C0"/>
                 </a:solidFill>
@@ -4706,7 +4706,7 @@
               <a:buNone/>
             </a:pPr>
             <a:r>
-              <a:rPr lang="en-US" sz="2400" b="1" i="0" dirty="0">
+              <a:rPr lang="en-US" sz="3200" b="1" i="0" dirty="0">
                 <a:solidFill>
                   <a:srgbClr val="FFFFFF"/>
                 </a:solidFill>
@@ -4727,7 +4727,7 @@
         <p:spPr>
           <a:xfrm>
             <a:off x="558800" y="5283200"/>
-            <a:ext cx="8458200" cy="2730500"/>
+            <a:ext cx="8458200" cy="2585323"/>
           </a:xfrm>
           <a:prstGeom prst="rect">
             <a:avLst/>
@@ -4739,11 +4739,11 @@
         </p:spPr>
         <p:txBody>
           <a:bodyPr wrap="square" lIns="0" tIns="0" rIns="0" bIns="0" rtlCol="0" anchor="t">
-            <a:noAutofit/>
+            <a:spAutoFit/>
           </a:bodyPr>
           <a:lstStyle/>
           <a:p>
-            <a:pPr marL="0" indent="0" algn="l">
+            <a:pPr marL="0" indent="0" algn="just">
               <a:lnSpc>
                 <a:spcPct val="100000"/>
               </a:lnSpc>
@@ -4763,67 +4763,7 @@
                 <a:latin typeface="Times New Roman"/>
                 <a:cs typeface="Times New Roman"/>
               </a:rPr>
-              <a:t>Machine-learning intrusion detectors often report accuracy above 99%, yet miss the rare attack families that matter most. Two causes recur: </a:t>
-            </a:r>
-            <a:r>
-              <a:rPr lang="en-US" sz="2400" b="1" i="0" dirty="0">
-                <a:solidFill>
-                  <a:srgbClr val="1E2A32"/>
-                </a:solidFill>
-                <a:latin typeface="Times New Roman"/>
-                <a:cs typeface="Times New Roman"/>
-              </a:rPr>
-              <a:t>severe class imbalance</a:t>
-            </a:r>
-            <a:r>
-              <a:rPr lang="en-US" sz="2400" b="0" i="0" dirty="0">
-                <a:solidFill>
-                  <a:srgbClr val="1E2A32"/>
-                </a:solidFill>
-                <a:latin typeface="Times New Roman"/>
-                <a:cs typeface="Times New Roman"/>
-              </a:rPr>
-              <a:t>, which accuracy hides, and </a:t>
-            </a:r>
-            <a:r>
-              <a:rPr lang="en-US" sz="2400" b="1" i="0" dirty="0">
-                <a:solidFill>
-                  <a:srgbClr val="1E2A32"/>
-                </a:solidFill>
-                <a:latin typeface="Times New Roman"/>
-                <a:cs typeface="Times New Roman"/>
-              </a:rPr>
-              <a:t>evaluation leakage</a:t>
-            </a:r>
-            <a:r>
-              <a:rPr lang="en-US" sz="2400" b="0" i="0" dirty="0">
-                <a:solidFill>
-                  <a:srgbClr val="1E2A32"/>
-                </a:solidFill>
-                <a:latin typeface="Times New Roman"/>
-                <a:cs typeface="Times New Roman"/>
-              </a:rPr>
-              <a:t> from duplicate records crossing the train–test split. This thesis builds a leakage-safe, imbalance-aware two-stage system that detects attacks and names their family on CIC-UNSW-NB15, judged by </a:t>
-            </a:r>
-            <a:r>
-              <a:rPr lang="en-US" sz="2400" b="1" i="0" dirty="0">
-                <a:solidFill>
-                  <a:srgbClr val="1E2A32"/>
-                </a:solidFill>
-                <a:latin typeface="Times New Roman"/>
-                <a:cs typeface="Times New Roman"/>
-              </a:rPr>
-              <a:t>macro-F1</a:t>
-            </a:r>
-            <a:r>
-              <a:rPr lang="en-US" sz="2400" b="0" i="0" dirty="0">
-                <a:solidFill>
-                  <a:srgbClr val="1E2A32"/>
-                </a:solidFill>
-                <a:latin typeface="Times New Roman"/>
-                <a:cs typeface="Times New Roman"/>
-              </a:rPr>
-              <a:t> rather than accuracy.</a:t>
+              <a:t>Machine-learning intrusion detectors often report accuracy above 99%, yet miss the rare attack families that matter most. Two causes recur: severe class imbalance, which accuracy hides, and evaluation leakage from duplicate records crossing the train–test split. This thesis builds a leakage-safe, imbalance-aware two-stage system that detects attacks and names their family on CIC-UNSW-NB15, judged by macro-F1 rather than accuracy.</a:t>
             </a:r>
           </a:p>
         </p:txBody>
@@ -4894,7 +4834,7 @@
               <a:buNone/>
             </a:pPr>
             <a:r>
-              <a:rPr lang="en-US" sz="1900" b="0" i="0" dirty="0">
+              <a:rPr lang="en-US" sz="2200" b="0" i="0" dirty="0">
                 <a:solidFill>
                   <a:srgbClr val="1E2A32"/>
                 </a:solidFill>
@@ -4972,7 +4912,7 @@
               <a:buNone/>
             </a:pPr>
             <a:r>
-              <a:rPr lang="en-US" sz="1900" b="0" i="0" dirty="0">
+              <a:rPr lang="en-US" sz="2200" b="0" i="0" dirty="0">
                 <a:solidFill>
                   <a:srgbClr val="1E2A32"/>
                 </a:solidFill>
@@ -5050,7 +4990,7 @@
               <a:buNone/>
             </a:pPr>
             <a:r>
-              <a:rPr lang="en-US" sz="1900" b="0" i="0" dirty="0">
+              <a:rPr lang="en-US" sz="2200" b="0" i="0" dirty="0">
                 <a:solidFill>
                   <a:srgbClr val="1E2A32"/>
                 </a:solidFill>
@@ -5071,7 +5011,7 @@
         <p:spPr>
           <a:xfrm>
             <a:off x="558800" y="10388600"/>
-            <a:ext cx="8458200" cy="508000"/>
+            <a:ext cx="8458200" cy="461665"/>
           </a:xfrm>
           <a:prstGeom prst="rect">
             <a:avLst/>
@@ -5083,7 +5023,7 @@
         </p:spPr>
         <p:txBody>
           <a:bodyPr wrap="square" lIns="0" tIns="0" rIns="0" bIns="0" rtlCol="0" anchor="t">
-            <a:noAutofit/>
+            <a:spAutoFit/>
           </a:bodyPr>
           <a:lstStyle/>
           <a:p>
@@ -5100,7 +5040,7 @@
               <a:buNone/>
             </a:pPr>
             <a:r>
-              <a:rPr lang="en-US" sz="2800" b="1" i="0" dirty="0">
+              <a:rPr lang="en-US" sz="3000" b="1" i="0" dirty="0">
                 <a:solidFill>
                   <a:srgbClr val="1E3A52"/>
                 </a:solidFill>
@@ -5121,7 +5061,7 @@
         <p:spPr>
           <a:xfrm>
             <a:off x="558800" y="10998200"/>
-            <a:ext cx="8458200" cy="3429000"/>
+            <a:ext cx="8458200" cy="3262432"/>
           </a:xfrm>
           <a:prstGeom prst="rect">
             <a:avLst/>
@@ -5133,11 +5073,11 @@
         </p:spPr>
         <p:txBody>
           <a:bodyPr wrap="square" lIns="0" tIns="0" rIns="0" bIns="0" rtlCol="0" anchor="t">
-            <a:noAutofit/>
+            <a:spAutoFit/>
           </a:bodyPr>
           <a:lstStyle/>
           <a:p>
-            <a:pPr marL="381000" indent="-381000" algn="l">
+            <a:pPr marL="381000" indent="-381000" algn="just">
               <a:lnSpc>
                 <a:spcPct val="100000"/>
               </a:lnSpc>
@@ -5161,31 +5101,11 @@
                 <a:latin typeface="Times New Roman"/>
                 <a:cs typeface="Times New Roman"/>
               </a:rPr>
-              <a:t>Build a </a:t>
-            </a:r>
-            <a:r>
-              <a:rPr lang="en-US" sz="2400" b="1" i="0" dirty="0">
-                <a:solidFill>
-                  <a:srgbClr val="1E2A32"/>
-                </a:solidFill>
-                <a:latin typeface="Times New Roman"/>
-                <a:cs typeface="Times New Roman"/>
-              </a:rPr>
-              <a:t>leakage-safe pipeline</a:t>
-            </a:r>
-            <a:r>
-              <a:rPr lang="en-US" sz="2400" b="0" i="0" dirty="0">
-                <a:solidFill>
-                  <a:srgbClr val="1E2A32"/>
-                </a:solidFill>
-                <a:latin typeface="Times New Roman"/>
-                <a:cs typeface="Times New Roman"/>
-              </a:rPr>
-              <a:t>: deduplicate first, fit every label-dependent step on training data only</a:t>
-            </a:r>
-          </a:p>
-          <a:p>
-            <a:pPr marL="381000" indent="-381000" algn="l">
+              <a:t>Build a leakage-safe pipeline: deduplicate first, fit every label-dependent step on training data only</a:t>
+            </a:r>
+          </a:p>
+          <a:p>
+            <a:pPr marL="381000" indent="-381000" algn="just">
               <a:lnSpc>
                 <a:spcPct val="100000"/>
               </a:lnSpc>
@@ -5209,31 +5129,11 @@
                 <a:latin typeface="Times New Roman"/>
                 <a:cs typeface="Times New Roman"/>
               </a:rPr>
-              <a:t>Compare </a:t>
-            </a:r>
-            <a:r>
-              <a:rPr lang="en-US" sz="2400" b="1" i="0" dirty="0">
-                <a:solidFill>
-                  <a:srgbClr val="1E2A32"/>
-                </a:solidFill>
-                <a:latin typeface="Times New Roman"/>
-                <a:cs typeface="Times New Roman"/>
-              </a:rPr>
-              <a:t>class-imbalance treatments</a:t>
-            </a:r>
-            <a:r>
-              <a:rPr lang="en-US" sz="2400" b="0" i="0" dirty="0">
-                <a:solidFill>
-                  <a:srgbClr val="1E2A32"/>
-                </a:solidFill>
-                <a:latin typeface="Times New Roman"/>
-                <a:cs typeface="Times New Roman"/>
-              </a:rPr>
-              <a:t> (class weighting, tempered weighting, SMOTE) on rare families</a:t>
-            </a:r>
-          </a:p>
-          <a:p>
-            <a:pPr marL="381000" indent="-381000" algn="l">
+              <a:t>Compare class-imbalance treatments (class weighting, tempered weighting, SMOTE) on rare families</a:t>
+            </a:r>
+          </a:p>
+          <a:p>
+            <a:pPr marL="381000" indent="-381000" algn="just">
               <a:lnSpc>
                 <a:spcPct val="100000"/>
               </a:lnSpc>
@@ -5257,31 +5157,11 @@
                 <a:latin typeface="Times New Roman"/>
                 <a:cs typeface="Times New Roman"/>
               </a:rPr>
-              <a:t>Design a </a:t>
-            </a:r>
-            <a:r>
-              <a:rPr lang="en-US" sz="2400" b="1" i="0" dirty="0">
-                <a:solidFill>
-                  <a:srgbClr val="1E2A32"/>
-                </a:solidFill>
-                <a:latin typeface="Times New Roman"/>
-                <a:cs typeface="Times New Roman"/>
-              </a:rPr>
-              <a:t>two-stage gate + family ensemble</a:t>
-            </a:r>
-            <a:r>
-              <a:rPr lang="en-US" sz="2400" b="0" i="0" dirty="0">
-                <a:solidFill>
-                  <a:srgbClr val="1E2A32"/>
-                </a:solidFill>
-                <a:latin typeface="Times New Roman"/>
-                <a:cs typeface="Times New Roman"/>
-              </a:rPr>
-              <a:t> and test each component with paired bootstrap tests</a:t>
-            </a:r>
-          </a:p>
-          <a:p>
-            <a:pPr marL="381000" indent="-381000" algn="l">
+              <a:t>Design a two-stage gate + family ensemble and test each component with paired bootstrap tests</a:t>
+            </a:r>
+          </a:p>
+          <a:p>
+            <a:pPr marL="381000" indent="-381000" algn="just">
               <a:lnSpc>
                 <a:spcPct val="100000"/>
               </a:lnSpc>
@@ -5305,27 +5185,7 @@
                 <a:latin typeface="Times New Roman"/>
                 <a:cs typeface="Times New Roman"/>
               </a:rPr>
-              <a:t>Evaluate at the </a:t>
-            </a:r>
-            <a:r>
-              <a:rPr lang="en-US" sz="2400" b="1" i="0" dirty="0">
-                <a:solidFill>
-                  <a:srgbClr val="1E2A32"/>
-                </a:solidFill>
-                <a:latin typeface="Times New Roman"/>
-                <a:cs typeface="Times New Roman"/>
-              </a:rPr>
-              <a:t>realistic 97.5% benign base rate</a:t>
-            </a:r>
-            <a:r>
-              <a:rPr lang="en-US" sz="2400" b="0" i="0" dirty="0">
-                <a:solidFill>
-                  <a:srgbClr val="1E2A32"/>
-                </a:solidFill>
-                <a:latin typeface="Times New Roman"/>
-                <a:cs typeface="Times New Roman"/>
-              </a:rPr>
-              <a:t> and under perturbed inputs</a:t>
+              <a:t>Evaluate at the realistic 97.5% benign base rate and under perturbed inputs</a:t>
             </a:r>
           </a:p>
         </p:txBody>
@@ -5372,7 +5232,7 @@
               <a:buNone/>
             </a:pPr>
             <a:r>
-              <a:rPr lang="en-US" sz="2400" b="1" i="0" dirty="0">
+              <a:rPr lang="en-US" sz="3200" b="1" i="0" dirty="0">
                 <a:solidFill>
                   <a:srgbClr val="FFFFFF"/>
                 </a:solidFill>
@@ -5393,7 +5253,7 @@
         <p:spPr>
           <a:xfrm>
             <a:off x="558800" y="15697200"/>
-            <a:ext cx="8458200" cy="1206500"/>
+            <a:ext cx="8458200" cy="738664"/>
           </a:xfrm>
           <a:prstGeom prst="rect">
             <a:avLst/>
@@ -5405,11 +5265,11 @@
         </p:spPr>
         <p:txBody>
           <a:bodyPr wrap="square" lIns="0" tIns="0" rIns="0" bIns="0" rtlCol="0" anchor="t">
-            <a:noAutofit/>
+            <a:spAutoFit/>
           </a:bodyPr>
           <a:lstStyle/>
           <a:p>
-            <a:pPr marL="0" indent="0" algn="l">
+            <a:pPr marL="0" indent="0" algn="just">
               <a:lnSpc>
                 <a:spcPct val="100000"/>
               </a:lnSpc>
@@ -5429,27 +5289,7 @@
                 <a:latin typeface="Times New Roman"/>
                 <a:cs typeface="Times New Roman"/>
               </a:rPr>
-              <a:t>The final system was trained on 2,085,442 flows and tested once on 521,361 held-out flows of the </a:t>
-            </a:r>
-            <a:r>
-              <a:rPr lang="en-US" sz="2400" b="1" i="0" dirty="0">
-                <a:solidFill>
-                  <a:srgbClr val="1E2A32"/>
-                </a:solidFill>
-                <a:latin typeface="Times New Roman"/>
-                <a:cs typeface="Times New Roman"/>
-              </a:rPr>
-              <a:t>full release (3.54M flows)</a:t>
-            </a:r>
-            <a:r>
-              <a:rPr lang="en-US" sz="2400" b="0" i="0" dirty="0">
-                <a:solidFill>
-                  <a:srgbClr val="1E2A32"/>
-                </a:solidFill>
-                <a:latin typeface="Times New Roman"/>
-                <a:cs typeface="Times New Roman"/>
-              </a:rPr>
-              <a:t>.</a:t>
+              <a:t>The final system was trained on 2,085,442 flows and tested once on 521,361 held-out flows of the full release (3.54M flows).</a:t>
             </a:r>
           </a:p>
         </p:txBody>
@@ -5462,8 +5302,8 @@
         </p:nvSpPr>
         <p:spPr>
           <a:xfrm>
-            <a:off x="558800" y="22199600"/>
-            <a:ext cx="8458200" cy="381000"/>
+            <a:off x="558800" y="22148800"/>
+            <a:ext cx="8458200" cy="338554"/>
           </a:xfrm>
           <a:prstGeom prst="rect">
             <a:avLst/>
@@ -5475,7 +5315,7 @@
         </p:spPr>
         <p:txBody>
           <a:bodyPr wrap="square" lIns="0" tIns="0" rIns="0" bIns="0" rtlCol="0" anchor="t">
-            <a:noAutofit/>
+            <a:spAutoFit/>
           </a:bodyPr>
           <a:lstStyle/>
           <a:p>
@@ -5492,7 +5332,7 @@
               <a:buNone/>
             </a:pPr>
             <a:r>
-              <a:rPr lang="en-US" sz="1900" b="0" i="1" dirty="0">
+              <a:rPr lang="en-US" sz="2200" b="0" i="1" dirty="0">
                 <a:solidFill>
                   <a:srgbClr val="203864"/>
                 </a:solidFill>
@@ -5543,7 +5383,7 @@
               <a:buNone/>
             </a:pPr>
             <a:r>
-              <a:rPr lang="en-US" sz="2400" b="1" i="0" dirty="0">
+              <a:rPr lang="en-US" sz="3200" b="1" i="0" dirty="0">
                 <a:solidFill>
                   <a:srgbClr val="FFFFFF"/>
                 </a:solidFill>
@@ -5564,7 +5404,7 @@
         <p:spPr>
           <a:xfrm>
             <a:off x="558800" y="23825200"/>
-            <a:ext cx="8458200" cy="1206500"/>
+            <a:ext cx="8458200" cy="1107996"/>
           </a:xfrm>
           <a:prstGeom prst="rect">
             <a:avLst/>
@@ -5576,11 +5416,11 @@
         </p:spPr>
         <p:txBody>
           <a:bodyPr wrap="square" lIns="0" tIns="0" rIns="0" bIns="0" rtlCol="0" anchor="t">
-            <a:noAutofit/>
+            <a:spAutoFit/>
           </a:bodyPr>
           <a:lstStyle/>
           <a:p>
-            <a:pPr marL="0" indent="0" algn="l">
+            <a:pPr marL="0" indent="0" algn="just">
               <a:spcBef>
                 <a:spcPts val="0"/>
               </a:spcBef>
@@ -5597,27 +5437,7 @@
                 <a:latin typeface="Times New Roman"/>
                 <a:cs typeface="Times New Roman"/>
               </a:rPr>
-              <a:t>CIC-UNSW-NB15 (2024) re-extracts UNSW-NB15 traffic with CICFlowMeter: </a:t>
-            </a:r>
-            <a:r>
-              <a:rPr lang="en-US" sz="2400" b="1" i="0" dirty="0">
-                <a:solidFill>
-                  <a:srgbClr val="1E2A32"/>
-                </a:solidFill>
-                <a:latin typeface="Times New Roman"/>
-                <a:cs typeface="Times New Roman"/>
-              </a:rPr>
-              <a:t>76 flow statistics</a:t>
-            </a:r>
-            <a:r>
-              <a:rPr lang="en-US" sz="2400" b="0" i="0" dirty="0">
-                <a:solidFill>
-                  <a:srgbClr val="1E2A32"/>
-                </a:solidFill>
-                <a:latin typeface="Times New Roman"/>
-                <a:cs typeface="Times New Roman"/>
-              </a:rPr>
-              <a:t> per record. Steps that use labels run after the split, on training data only.</a:t>
+              <a:t>CIC-UNSW-NB15 (2024) re-extracts UNSW-NB15 traffic with CICFlowMeter: 76 flow statistics per record. Steps that use labels run after the split, on training data only.</a:t>
             </a:r>
           </a:p>
         </p:txBody>
@@ -5631,7 +5451,7 @@
         <p:spPr>
           <a:xfrm>
             <a:off x="558800" y="33680400"/>
-            <a:ext cx="8458200" cy="381000"/>
+            <a:ext cx="8458200" cy="338554"/>
           </a:xfrm>
           <a:prstGeom prst="rect">
             <a:avLst/>
@@ -5643,7 +5463,7 @@
         </p:spPr>
         <p:txBody>
           <a:bodyPr wrap="square" lIns="0" tIns="0" rIns="0" bIns="0" rtlCol="0" anchor="t">
-            <a:noAutofit/>
+            <a:spAutoFit/>
           </a:bodyPr>
           <a:lstStyle/>
           <a:p>
@@ -5660,7 +5480,7 @@
               <a:buNone/>
             </a:pPr>
             <a:r>
-              <a:rPr lang="en-US" sz="1900" b="0" i="1" dirty="0">
+              <a:rPr lang="en-US" sz="2200" b="0" i="1" dirty="0">
                 <a:solidFill>
                   <a:srgbClr val="203864"/>
                 </a:solidFill>
@@ -5681,7 +5501,7 @@
         <p:spPr>
           <a:xfrm>
             <a:off x="558800" y="34290000"/>
-            <a:ext cx="8458200" cy="431800"/>
+            <a:ext cx="8458200" cy="338554"/>
           </a:xfrm>
           <a:prstGeom prst="rect">
             <a:avLst/>
@@ -5693,7 +5513,7 @@
         </p:spPr>
         <p:txBody>
           <a:bodyPr wrap="square" lIns="91440" tIns="0" rIns="91440" bIns="0" rtlCol="0" anchor="t">
-            <a:noAutofit/>
+            <a:spAutoFit/>
           </a:bodyPr>
           <a:lstStyle/>
           <a:p>
@@ -5728,7 +5548,7 @@
         <p:spPr>
           <a:xfrm>
             <a:off x="558800" y="41859200"/>
-            <a:ext cx="8458200" cy="381000"/>
+            <a:ext cx="8458200" cy="338554"/>
           </a:xfrm>
           <a:prstGeom prst="rect">
             <a:avLst/>
@@ -5737,13 +5557,13 @@
         </p:spPr>
         <p:txBody>
           <a:bodyPr wrap="square" lIns="0" tIns="0" rIns="0" bIns="0">
-            <a:noAutofit/>
+            <a:spAutoFit/>
           </a:bodyPr>
           <a:lstStyle/>
           <a:p>
             <a:pPr algn="ctr"/>
             <a:r>
-              <a:rPr lang="en-US" sz="1900" i="1" dirty="0">
+              <a:rPr lang="en-US" sz="2200" i="1" dirty="0">
                 <a:solidFill>
                   <a:srgbClr val="203864"/>
                 </a:solidFill>
@@ -5810,7 +5630,7 @@
               <a:buNone/>
             </a:pPr>
             <a:r>
-              <a:rPr lang="en-US" sz="2400" b="1" i="0" dirty="0">
+              <a:rPr lang="en-US" sz="3200" b="1" i="0" dirty="0">
                 <a:solidFill>
                   <a:srgbClr val="FFFFFF"/>
                 </a:solidFill>
@@ -5831,7 +5651,7 @@
         <p:spPr>
           <a:xfrm>
             <a:off x="9474200" y="5283200"/>
-            <a:ext cx="8458200" cy="1206500"/>
+            <a:ext cx="8458200" cy="1107996"/>
           </a:xfrm>
           <a:prstGeom prst="rect">
             <a:avLst/>
@@ -5843,11 +5663,11 @@
         </p:spPr>
         <p:txBody>
           <a:bodyPr wrap="square" lIns="0" tIns="0" rIns="0" bIns="0" rtlCol="0" anchor="t">
-            <a:noAutofit/>
+            <a:spAutoFit/>
           </a:bodyPr>
           <a:lstStyle/>
           <a:p>
-            <a:pPr marL="0" indent="0" algn="l">
+            <a:pPr marL="0" indent="0" algn="just">
               <a:spcBef>
                 <a:spcPts val="0"/>
               </a:spcBef>
@@ -5864,47 +5684,7 @@
                 <a:latin typeface="Times New Roman"/>
                 <a:cs typeface="Times New Roman"/>
               </a:rPr>
-              <a:t>A binary </a:t>
-            </a:r>
-            <a:r>
-              <a:rPr lang="en-US" sz="2400" b="1" i="0" dirty="0">
-                <a:solidFill>
-                  <a:srgbClr val="1E2A32"/>
-                </a:solidFill>
-                <a:latin typeface="Times New Roman"/>
-                <a:cs typeface="Times New Roman"/>
-              </a:rPr>
-              <a:t>gate</a:t>
-            </a:r>
-            <a:r>
-              <a:rPr lang="en-US" sz="2400" b="0" i="0" dirty="0">
-                <a:solidFill>
-                  <a:srgbClr val="1E2A32"/>
-                </a:solidFill>
-                <a:latin typeface="Times New Roman"/>
-                <a:cs typeface="Times New Roman"/>
-              </a:rPr>
-              <a:t> screens every flow; only suspected attacks reach a </a:t>
-            </a:r>
-            <a:r>
-              <a:rPr lang="en-US" sz="2400" b="1" i="0" dirty="0">
-                <a:solidFill>
-                  <a:srgbClr val="1E2A32"/>
-                </a:solidFill>
-                <a:latin typeface="Times New Roman"/>
-                <a:cs typeface="Times New Roman"/>
-              </a:rPr>
-              <a:t>seven-member ensemble</a:t>
-            </a:r>
-            <a:r>
-              <a:rPr lang="en-US" sz="2400" b="0" i="0" dirty="0">
-                <a:solidFill>
-                  <a:srgbClr val="1E2A32"/>
-                </a:solidFill>
-                <a:latin typeface="Times New Roman"/>
-                <a:cs typeface="Times New Roman"/>
-              </a:rPr>
-              <a:t> that names the family. Members differ in how strongly they rebalance classes.</a:t>
+              <a:t>A binary gate screens every flow; only suspected attacks reach a seven-member ensemble that names the family. Members differ in how strongly they rebalance classes.</a:t>
             </a:r>
           </a:p>
         </p:txBody>
@@ -5969,7 +5749,7 @@
               <a:buNone/>
             </a:pPr>
             <a:r>
-              <a:rPr lang="en-US" sz="2000" b="0" i="0" dirty="0">
+              <a:rPr lang="en-US" sz="2200" b="0" i="0" dirty="0">
                 <a:solidFill>
                   <a:srgbClr val="1E2A32"/>
                 </a:solidFill>
@@ -6105,7 +5885,7 @@
               <a:t>43 </a:t>
             </a:r>
             <a:r>
-              <a:rPr lang="en-US" sz="1900" b="0" i="0" dirty="0">
+              <a:rPr lang="en-US" sz="2200" b="0" i="0" dirty="0">
                 <a:solidFill>
                   <a:srgbClr val="1E2A32"/>
                 </a:solidFill>
@@ -6168,7 +5948,7 @@
               <a:t>31 </a:t>
             </a:r>
             <a:r>
-              <a:rPr lang="en-US" sz="1900" b="0" i="0" dirty="0">
+              <a:rPr lang="en-US" sz="2200" b="0" i="0" dirty="0">
                 <a:solidFill>
                   <a:srgbClr val="1E2A32"/>
                 </a:solidFill>
@@ -6231,7 +6011,7 @@
               <a:t>25 </a:t>
             </a:r>
             <a:r>
-              <a:rPr lang="en-US" sz="1900" b="0" i="0" dirty="0">
+              <a:rPr lang="en-US" sz="2200" b="0" i="0" dirty="0">
                 <a:solidFill>
                   <a:srgbClr val="1E2A32"/>
                 </a:solidFill>
@@ -6325,7 +6105,7 @@
               <a:buNone/>
             </a:pPr>
             <a:r>
-              <a:rPr lang="en-US" sz="2000" b="0" i="0" dirty="0">
+              <a:rPr lang="en-US" sz="2200" b="0" i="0" dirty="0">
                 <a:solidFill>
                   <a:srgbClr val="CFE0E9"/>
                 </a:solidFill>
@@ -6400,7 +6180,7 @@
               <a:buNone/>
             </a:pPr>
             <a:r>
-              <a:rPr lang="en-US" sz="2100" b="1" i="0" dirty="0">
+              <a:rPr lang="en-US" sz="2200" b="1" i="0" dirty="0">
                 <a:solidFill>
                   <a:srgbClr val="1E3A52"/>
                 </a:solidFill>
@@ -6442,8 +6222,8 @@
         </p:nvSpPr>
         <p:spPr>
           <a:xfrm>
-            <a:off x="12623800" y="11582400"/>
-            <a:ext cx="1905000" cy="431800"/>
+            <a:off x="12623800" y="11629023"/>
+            <a:ext cx="1905000" cy="338554"/>
           </a:xfrm>
           <a:prstGeom prst="rect">
             <a:avLst/>
@@ -6455,7 +6235,7 @@
         </p:spPr>
         <p:txBody>
           <a:bodyPr wrap="square" lIns="0" tIns="0" rIns="0" bIns="0" rtlCol="0" anchor="ctr">
-            <a:noAutofit/>
+            <a:spAutoFit/>
           </a:bodyPr>
           <a:lstStyle/>
           <a:p>
@@ -6469,7 +6249,7 @@
               <a:buNone/>
             </a:pPr>
             <a:r>
-              <a:rPr lang="en-US" sz="1900" b="0" i="1" dirty="0">
+              <a:rPr lang="en-US" sz="2200" b="0" i="1" dirty="0">
                 <a:solidFill>
                   <a:srgbClr val="5A6B78"/>
                 </a:solidFill>
@@ -6575,7 +6355,7 @@
               <a:buNone/>
             </a:pPr>
             <a:r>
-              <a:rPr lang="en-US" sz="2000" b="1" i="0" dirty="0">
+              <a:rPr lang="en-US" sz="2200" b="1" i="0" dirty="0">
                 <a:solidFill>
                   <a:srgbClr val="1E2A32"/>
                 </a:solidFill>
@@ -6628,7 +6408,7 @@
               <a:buNone/>
             </a:pPr>
             <a:r>
-              <a:rPr lang="en-US" sz="2000" b="1" i="0" dirty="0">
+              <a:rPr lang="en-US" sz="2200" b="1" i="0" dirty="0">
                 <a:solidFill>
                   <a:srgbClr val="1E3A52"/>
                 </a:solidFill>
@@ -6681,7 +6461,7 @@
               <a:buNone/>
             </a:pPr>
             <a:r>
-              <a:rPr lang="en-US" sz="2000" b="1" i="0" dirty="0">
+              <a:rPr lang="en-US" sz="2200" b="1" i="0" dirty="0">
                 <a:solidFill>
                   <a:srgbClr val="1E2A32"/>
                 </a:solidFill>
@@ -6734,7 +6514,7 @@
               <a:buNone/>
             </a:pPr>
             <a:r>
-              <a:rPr lang="en-US" sz="2000" b="1" i="0" dirty="0">
+              <a:rPr lang="en-US" sz="2200" b="1" i="0" dirty="0">
                 <a:solidFill>
                   <a:srgbClr val="1E2A32"/>
                 </a:solidFill>
@@ -6787,7 +6567,7 @@
               <a:buNone/>
             </a:pPr>
             <a:r>
-              <a:rPr lang="en-US" sz="2000" b="1" i="0" dirty="0">
+              <a:rPr lang="en-US" sz="2200" b="1" i="0" dirty="0">
                 <a:solidFill>
                   <a:srgbClr val="1E2A32"/>
                 </a:solidFill>
@@ -6840,7 +6620,7 @@
               <a:buNone/>
             </a:pPr>
             <a:r>
-              <a:rPr lang="en-US" sz="2000" b="1" i="0" dirty="0">
+              <a:rPr lang="en-US" sz="2200" b="1" i="0" dirty="0">
                 <a:solidFill>
                   <a:srgbClr val="1E2A32"/>
                 </a:solidFill>
@@ -6893,7 +6673,7 @@
               <a:buNone/>
             </a:pPr>
             <a:r>
-              <a:rPr lang="en-US" sz="2000" b="1" i="0" dirty="0">
+              <a:rPr lang="en-US" sz="2200" b="1" i="0" dirty="0">
                 <a:solidFill>
                   <a:srgbClr val="1E2A32"/>
                 </a:solidFill>
@@ -6987,7 +6767,7 @@
               <a:buNone/>
             </a:pPr>
             <a:r>
-              <a:rPr lang="en-US" sz="2000" b="0" i="0" dirty="0">
+              <a:rPr lang="en-US" sz="2200" b="0" i="0" dirty="0">
                 <a:solidFill>
                   <a:srgbClr val="CFE0E9"/>
                 </a:solidFill>
@@ -7156,7 +6936,7 @@
         <p:spPr>
           <a:xfrm>
             <a:off x="9474200" y="18084800"/>
-            <a:ext cx="8458200" cy="381000"/>
+            <a:ext cx="8458200" cy="677108"/>
           </a:xfrm>
           <a:prstGeom prst="rect">
             <a:avLst/>
@@ -7168,7 +6948,7 @@
         </p:spPr>
         <p:txBody>
           <a:bodyPr wrap="square" lIns="0" tIns="0" rIns="0" bIns="0" rtlCol="0" anchor="t">
-            <a:noAutofit/>
+            <a:spAutoFit/>
           </a:bodyPr>
           <a:lstStyle/>
           <a:p>
@@ -7182,7 +6962,7 @@
               <a:buNone/>
             </a:pPr>
             <a:r>
-              <a:rPr lang="en-US" sz="1900" b="0" i="1" dirty="0">
+              <a:rPr lang="en-US" sz="2200" b="0" i="1" dirty="0">
                 <a:solidFill>
                   <a:srgbClr val="203864"/>
                 </a:solidFill>
@@ -7202,8 +6982,8 @@
         </p:nvSpPr>
         <p:spPr>
           <a:xfrm>
-            <a:off x="9474200" y="18719800"/>
-            <a:ext cx="8458200" cy="508000"/>
+            <a:off x="9474200" y="18923000"/>
+            <a:ext cx="8458200" cy="461665"/>
           </a:xfrm>
           <a:prstGeom prst="rect">
             <a:avLst/>
@@ -7215,7 +6995,7 @@
         </p:spPr>
         <p:txBody>
           <a:bodyPr wrap="square" lIns="0" tIns="0" rIns="0" bIns="0" rtlCol="0" anchor="t">
-            <a:noAutofit/>
+            <a:spAutoFit/>
           </a:bodyPr>
           <a:lstStyle/>
           <a:p>
@@ -7229,7 +7009,7 @@
               <a:buNone/>
             </a:pPr>
             <a:r>
-              <a:rPr lang="en-US" sz="2800" b="1" i="0" dirty="0">
+              <a:rPr lang="en-US" sz="3000" b="1" i="0" dirty="0">
                 <a:solidFill>
                   <a:srgbClr val="1E3A52"/>
                 </a:solidFill>
@@ -7249,8 +7029,8 @@
         </p:nvSpPr>
         <p:spPr>
           <a:xfrm>
-            <a:off x="9474200" y="19329400"/>
-            <a:ext cx="8458200" cy="2286000"/>
+            <a:off x="9474200" y="19481800"/>
+            <a:ext cx="8458200" cy="1682512"/>
           </a:xfrm>
           <a:prstGeom prst="rect">
             <a:avLst/>
@@ -7262,11 +7042,11 @@
         </p:spPr>
         <p:txBody>
           <a:bodyPr wrap="square" lIns="0" tIns="0" rIns="0" bIns="0" rtlCol="0" anchor="t">
-            <a:noAutofit/>
+            <a:spAutoFit/>
           </a:bodyPr>
           <a:lstStyle/>
           <a:p>
-            <a:pPr marL="381000" indent="-381000" algn="l">
+            <a:pPr marL="381000" indent="-381000" algn="just">
               <a:spcBef>
                 <a:spcPts val="0"/>
               </a:spcBef>
@@ -7287,31 +7067,11 @@
                 <a:latin typeface="Times New Roman"/>
                 <a:cs typeface="Times New Roman"/>
               </a:rPr>
-              <a:t>Duplicates removed </a:t>
-            </a:r>
-            <a:r>
-              <a:rPr lang="en-US" sz="2400" b="1" i="0" dirty="0">
-                <a:solidFill>
-                  <a:srgbClr val="1E2A32"/>
-                </a:solidFill>
-                <a:latin typeface="Times New Roman"/>
-                <a:cs typeface="Times New Roman"/>
-              </a:rPr>
-              <a:t>before</a:t>
-            </a:r>
-            <a:r>
-              <a:rPr lang="en-US" sz="2400" b="0" i="0" dirty="0">
-                <a:solidFill>
-                  <a:srgbClr val="1E2A32"/>
-                </a:solidFill>
-                <a:latin typeface="Times New Roman"/>
-                <a:cs typeface="Times New Roman"/>
-              </a:rPr>
-              <a:t> the train–test split</a:t>
-            </a:r>
-          </a:p>
-          <a:p>
-            <a:pPr marL="381000" indent="-381000" algn="l">
+              <a:t>Duplicates removed before the train–test split</a:t>
+            </a:r>
+          </a:p>
+          <a:p>
+            <a:pPr marL="381000" indent="-381000" algn="just">
               <a:spcBef>
                 <a:spcPts val="0"/>
               </a:spcBef>
@@ -7332,31 +7092,11 @@
                 <a:latin typeface="Times New Roman"/>
                 <a:cs typeface="Times New Roman"/>
               </a:rPr>
-              <a:t>Combiner weights fitted on </a:t>
-            </a:r>
-            <a:r>
-              <a:rPr lang="en-US" sz="2400" b="1" i="0" dirty="0">
-                <a:solidFill>
-                  <a:srgbClr val="1E2A32"/>
-                </a:solidFill>
-                <a:latin typeface="Times New Roman"/>
-                <a:cs typeface="Times New Roman"/>
-              </a:rPr>
-              <a:t>cross-fitted out-of-fold</a:t>
-            </a:r>
-            <a:r>
-              <a:rPr lang="en-US" sz="2400" b="0" i="0" dirty="0">
-                <a:solidFill>
-                  <a:srgbClr val="1E2A32"/>
-                </a:solidFill>
-                <a:latin typeface="Times New Roman"/>
-                <a:cs typeface="Times New Roman"/>
-              </a:rPr>
-              <a:t> predictions</a:t>
-            </a:r>
-          </a:p>
-          <a:p>
-            <a:pPr marL="381000" indent="-381000" algn="l">
+              <a:t>Combiner weights fitted on cross-fitted out-of-fold predictions</a:t>
+            </a:r>
+          </a:p>
+          <a:p>
+            <a:pPr marL="381000" indent="-381000" algn="just">
               <a:spcBef>
                 <a:spcPts val="0"/>
               </a:spcBef>
@@ -7377,47 +7117,7 @@
                 <a:latin typeface="Times New Roman"/>
                 <a:cs typeface="Times New Roman"/>
               </a:rPr>
-              <a:t>Test set scored </a:t>
-            </a:r>
-            <a:r>
-              <a:rPr lang="en-US" sz="2400" b="1" i="0" dirty="0">
-                <a:solidFill>
-                  <a:srgbClr val="1E2A32"/>
-                </a:solidFill>
-                <a:latin typeface="Times New Roman"/>
-                <a:cs typeface="Times New Roman"/>
-              </a:rPr>
-              <a:t>once</a:t>
-            </a:r>
-            <a:r>
-              <a:rPr lang="en-US" sz="2400" b="0" i="0" dirty="0">
-                <a:solidFill>
-                  <a:srgbClr val="1E2A32"/>
-                </a:solidFill>
-                <a:latin typeface="Times New Roman"/>
-                <a:cs typeface="Times New Roman"/>
-              </a:rPr>
-              <a:t>; every gain checked with a </a:t>
-            </a:r>
-            <a:r>
-              <a:rPr lang="en-US" sz="2400" b="1" i="0" dirty="0">
-                <a:solidFill>
-                  <a:srgbClr val="1E2A32"/>
-                </a:solidFill>
-                <a:latin typeface="Times New Roman"/>
-                <a:cs typeface="Times New Roman"/>
-              </a:rPr>
-              <a:t>paired bootstrap</a:t>
-            </a:r>
-            <a:r>
-              <a:rPr lang="en-US" sz="2400" b="0" i="0" dirty="0">
-                <a:solidFill>
-                  <a:srgbClr val="1E2A32"/>
-                </a:solidFill>
-                <a:latin typeface="Times New Roman"/>
-                <a:cs typeface="Times New Roman"/>
-              </a:rPr>
-              <a:t> (2,000 resamples)</a:t>
+              <a:t>Test set scored once; every gain checked with a paired bootstrap (2,000 resamples)</a:t>
             </a:r>
           </a:p>
         </p:txBody>
@@ -7464,7 +7164,7 @@
               <a:buNone/>
             </a:pPr>
             <a:r>
-              <a:rPr lang="en-US" sz="2400" b="1" i="0" dirty="0">
+              <a:rPr lang="en-US" sz="3200" b="1" i="0" dirty="0">
                 <a:solidFill>
                   <a:srgbClr val="FFFFFF"/>
                 </a:solidFill>
@@ -7542,14 +7242,14 @@
               <a:buNone/>
             </a:pPr>
             <a:r>
-              <a:rPr lang="en-US" sz="1900" b="0" i="0" dirty="0">
+              <a:rPr lang="en-US" sz="2200" b="0" i="0" dirty="0">
                 <a:solidFill>
                   <a:srgbClr val="1E2A32"/>
                 </a:solidFill>
                 <a:latin typeface="Times New Roman"/>
                 <a:cs typeface="Times New Roman"/>
               </a:rPr>
-              <a:t>macro-F1, full release [0.672, 0.704]</a:t>
+              <a:t>macro-F1, full release</a:t>
             </a:r>
           </a:p>
         </p:txBody>
@@ -7620,7 +7320,7 @@
               <a:buNone/>
             </a:pPr>
             <a:r>
-              <a:rPr lang="en-US" sz="1900" b="0" i="0" dirty="0">
+              <a:rPr lang="en-US" sz="2200" b="0" i="0" dirty="0">
                 <a:solidFill>
                   <a:srgbClr val="1E2A32"/>
                 </a:solidFill>
@@ -7698,7 +7398,7 @@
               <a:buNone/>
             </a:pPr>
             <a:r>
-              <a:rPr lang="en-US" sz="1900" b="0" i="0" dirty="0">
+              <a:rPr lang="en-US" sz="2200" b="0" i="0" dirty="0">
                 <a:solidFill>
                   <a:srgbClr val="1E2A32"/>
                 </a:solidFill>
@@ -7719,7 +7419,7 @@
         <p:spPr>
           <a:xfrm>
             <a:off x="9474200" y="24765000"/>
-            <a:ext cx="8458200" cy="431800"/>
+            <a:ext cx="8458200" cy="338554"/>
           </a:xfrm>
           <a:prstGeom prst="rect">
             <a:avLst/>
@@ -7731,7 +7431,7 @@
         </p:spPr>
         <p:txBody>
           <a:bodyPr wrap="square" lIns="91440" tIns="0" rIns="91440" bIns="0" rtlCol="0" anchor="t">
-            <a:noAutofit/>
+            <a:spAutoFit/>
           </a:bodyPr>
           <a:lstStyle/>
           <a:p>
@@ -7769,7 +7469,7 @@
         <p:spPr>
           <a:xfrm>
             <a:off x="9474200" y="32461200"/>
-            <a:ext cx="8458200" cy="381000"/>
+            <a:ext cx="8458200" cy="338554"/>
           </a:xfrm>
           <a:prstGeom prst="rect">
             <a:avLst/>
@@ -7781,7 +7481,7 @@
         </p:spPr>
         <p:txBody>
           <a:bodyPr wrap="square" lIns="0" tIns="0" rIns="0" bIns="0" rtlCol="0" anchor="t">
-            <a:noAutofit/>
+            <a:spAutoFit/>
           </a:bodyPr>
           <a:lstStyle/>
           <a:p>
@@ -7798,7 +7498,7 @@
               <a:buNone/>
             </a:pPr>
             <a:r>
-              <a:rPr lang="en-US" sz="1900" b="0" i="1" dirty="0">
+              <a:rPr lang="en-US" sz="2200" b="0" i="1" dirty="0">
                 <a:solidFill>
                   <a:srgbClr val="203864"/>
                 </a:solidFill>
@@ -7819,7 +7519,7 @@
         <p:spPr>
           <a:xfrm>
             <a:off x="9474200" y="33096200"/>
-            <a:ext cx="8458200" cy="431800"/>
+            <a:ext cx="8458200" cy="338554"/>
           </a:xfrm>
           <a:prstGeom prst="rect">
             <a:avLst/>
@@ -7831,7 +7531,7 @@
         </p:spPr>
         <p:txBody>
           <a:bodyPr wrap="square" lIns="91440" tIns="0" rIns="91440" bIns="0" rtlCol="0" anchor="t">
-            <a:noAutofit/>
+            <a:spAutoFit/>
           </a:bodyPr>
           <a:lstStyle/>
           <a:p>
@@ -7868,8 +7568,8 @@
         </p:nvSpPr>
         <p:spPr>
           <a:xfrm>
-            <a:off x="9474200" y="41859200"/>
-            <a:ext cx="8458200" cy="381000"/>
+            <a:off x="9474200" y="41592500"/>
+            <a:ext cx="8458200" cy="677108"/>
           </a:xfrm>
           <a:prstGeom prst="rect">
             <a:avLst/>
@@ -7881,7 +7581,7 @@
         </p:spPr>
         <p:txBody>
           <a:bodyPr wrap="square" lIns="0" tIns="0" rIns="0" bIns="0" rtlCol="0" anchor="t">
-            <a:noAutofit/>
+            <a:spAutoFit/>
           </a:bodyPr>
           <a:lstStyle/>
           <a:p>
@@ -7898,7 +7598,7 @@
               <a:buNone/>
             </a:pPr>
             <a:r>
-              <a:rPr lang="en-US" sz="1900" b="0" i="1" dirty="0">
+              <a:rPr lang="en-US" sz="2200" b="0" i="1" dirty="0">
                 <a:solidFill>
                   <a:srgbClr val="203864"/>
                 </a:solidFill>
@@ -7934,7 +7634,7 @@
         </p:nvGraphicFramePr>
         <p:xfrm>
           <a:off x="9474200" y="33591500"/>
-          <a:ext cx="8458200" cy="8255000"/>
+          <a:ext cx="8458200" cy="7924800"/>
         </p:xfrm>
         <a:graphic>
           <a:graphicData uri="http://schemas.openxmlformats.org/drawingml/2006/chart">
@@ -7950,7 +7650,7 @@
         </p:nvSpPr>
         <p:spPr>
           <a:xfrm>
-            <a:off x="18415000" y="4318000"/>
+            <a:off x="18415000" y="13257865"/>
             <a:ext cx="8458200" cy="736600"/>
           </a:xfrm>
           <a:prstGeom prst="roundRect">
@@ -7981,7 +7681,7 @@
               <a:buNone/>
             </a:pPr>
             <a:r>
-              <a:rPr lang="en-US" sz="2400" b="1" i="0" dirty="0">
+              <a:rPr lang="en-US" sz="3200" b="1" i="0" dirty="0">
                 <a:solidFill>
                   <a:srgbClr val="FFFFFF"/>
                 </a:solidFill>
@@ -8001,8 +7701,8 @@
         </p:nvSpPr>
         <p:spPr>
           <a:xfrm>
-            <a:off x="18415000" y="5283200"/>
-            <a:ext cx="8458200" cy="825500"/>
+            <a:off x="18415000" y="14223065"/>
+            <a:ext cx="8458200" cy="738664"/>
           </a:xfrm>
           <a:prstGeom prst="rect">
             <a:avLst/>
@@ -8014,11 +7714,11 @@
         </p:spPr>
         <p:txBody>
           <a:bodyPr wrap="square" lIns="0" tIns="0" rIns="0" bIns="0" rtlCol="0" anchor="t">
-            <a:noAutofit/>
+            <a:spAutoFit/>
           </a:bodyPr>
           <a:lstStyle/>
           <a:p>
-            <a:pPr marL="0" indent="0" algn="l">
+            <a:pPr marL="0" indent="0" algn="just">
               <a:spcBef>
                 <a:spcPts val="0"/>
               </a:spcBef>
@@ -8035,27 +7735,7 @@
                 <a:latin typeface="Times New Roman"/>
                 <a:cs typeface="Times New Roman"/>
               </a:rPr>
-              <a:t>Gains came from </a:t>
-            </a:r>
-            <a:r>
-              <a:rPr lang="en-US" sz="2400" b="1" i="0" dirty="0">
-                <a:solidFill>
-                  <a:srgbClr val="1E2A32"/>
-                </a:solidFill>
-                <a:latin typeface="Times New Roman"/>
-                <a:cs typeface="Times New Roman"/>
-              </a:rPr>
-              <a:t>better information and moderate rebalancing</a:t>
-            </a:r>
-            <a:r>
-              <a:rPr lang="en-US" sz="2400" b="0" i="0" dirty="0">
-                <a:solidFill>
-                  <a:srgbClr val="1E2A32"/>
-                </a:solidFill>
-                <a:latin typeface="Times New Roman"/>
-                <a:cs typeface="Times New Roman"/>
-              </a:rPr>
-              <a:t>, not from a bigger model.</a:t>
+              <a:t>Gains came from better information and moderate rebalancing, not from a bigger model.</a:t>
             </a:r>
           </a:p>
         </p:txBody>
@@ -8068,8 +7748,8 @@
         </p:nvSpPr>
         <p:spPr>
           <a:xfrm>
-            <a:off x="18415000" y="6299200"/>
-            <a:ext cx="8458200" cy="431800"/>
+            <a:off x="18415000" y="15139529"/>
+            <a:ext cx="8458200" cy="338554"/>
           </a:xfrm>
           <a:prstGeom prst="rect">
             <a:avLst/>
@@ -8081,7 +7761,7 @@
         </p:spPr>
         <p:txBody>
           <a:bodyPr wrap="square" lIns="91440" tIns="0" rIns="91440" bIns="0" rtlCol="0" anchor="t">
-            <a:noAutofit/>
+            <a:spAutoFit/>
           </a:bodyPr>
           <a:lstStyle/>
           <a:p>
@@ -8115,8 +7795,8 @@
         </p:nvSpPr>
         <p:spPr>
           <a:xfrm>
-            <a:off x="18415000" y="12700000"/>
-            <a:ext cx="8458200" cy="381000"/>
+            <a:off x="18415000" y="20685083"/>
+            <a:ext cx="8458200" cy="338554"/>
           </a:xfrm>
           <a:prstGeom prst="rect">
             <a:avLst/>
@@ -8128,7 +7808,7 @@
         </p:spPr>
         <p:txBody>
           <a:bodyPr wrap="square" lIns="0" tIns="0" rIns="0" bIns="0" rtlCol="0" anchor="t">
-            <a:noAutofit/>
+            <a:spAutoFit/>
           </a:bodyPr>
           <a:lstStyle/>
           <a:p>
@@ -8142,7 +7822,7 @@
               <a:buNone/>
             </a:pPr>
             <a:r>
-              <a:rPr lang="en-US" sz="1900" b="0" i="1" dirty="0">
+              <a:rPr lang="en-US" sz="2200" b="0" i="1" dirty="0">
                 <a:solidFill>
                   <a:srgbClr val="203864"/>
                 </a:solidFill>
@@ -8162,8 +7842,8 @@
         </p:nvSpPr>
         <p:spPr>
           <a:xfrm>
-            <a:off x="18415000" y="13284200"/>
-            <a:ext cx="8458200" cy="2603500"/>
+            <a:off x="18415000" y="21201437"/>
+            <a:ext cx="8458200" cy="1579920"/>
           </a:xfrm>
           <a:prstGeom prst="rect">
             <a:avLst/>
@@ -8175,11 +7855,11 @@
         </p:spPr>
         <p:txBody>
           <a:bodyPr wrap="square" lIns="0" tIns="0" rIns="0" bIns="0" rtlCol="0" anchor="t">
-            <a:noAutofit/>
+            <a:spAutoFit/>
           </a:bodyPr>
           <a:lstStyle/>
           <a:p>
-            <a:pPr marL="381000" indent="-381000" algn="l">
+            <a:pPr marL="381000" indent="-381000" algn="just">
               <a:spcBef>
                 <a:spcPts val="0"/>
               </a:spcBef>
@@ -8200,31 +7880,11 @@
                 <a:latin typeface="Times New Roman"/>
                 <a:cs typeface="Times New Roman"/>
               </a:rPr>
-              <a:t>Errors come from </a:t>
-            </a:r>
-            <a:r>
-              <a:rPr lang="en-US" sz="2400" b="1" i="0" dirty="0">
-                <a:solidFill>
-                  <a:srgbClr val="1E2A32"/>
-                </a:solidFill>
-                <a:latin typeface="Times New Roman"/>
-                <a:cs typeface="Times New Roman"/>
-              </a:rPr>
-              <a:t>class overlap</a:t>
-            </a:r>
-            <a:r>
-              <a:rPr lang="en-US" sz="2400" b="0" i="0" dirty="0">
-                <a:solidFill>
-                  <a:srgbClr val="1E2A32"/>
-                </a:solidFill>
-                <a:latin typeface="Times New Roman"/>
-                <a:cs typeface="Times New Roman"/>
-              </a:rPr>
-              <a:t>, not label noise: only 0.35% of flows have conflicting labels</a:t>
-            </a:r>
-          </a:p>
-          <a:p>
-            <a:pPr marL="381000" indent="-381000" algn="l">
+              <a:t>Errors come from class overlap, not label noise: only 0.35% of flows have conflicting labels</a:t>
+            </a:r>
+          </a:p>
+          <a:p>
+            <a:pPr marL="381000" indent="-381000" algn="just">
               <a:spcBef>
                 <a:spcPts val="0"/>
               </a:spcBef>
@@ -8245,27 +7905,7 @@
                 <a:latin typeface="Times New Roman"/>
                 <a:cs typeface="Times New Roman"/>
               </a:rPr>
-              <a:t>k-NN overlap tracks model confusions (Spearman </a:t>
-            </a:r>
-            <a:r>
-              <a:rPr lang="en-US" sz="2400" b="1" i="0" dirty="0">
-                <a:solidFill>
-                  <a:srgbClr val="1E2A32"/>
-                </a:solidFill>
-                <a:latin typeface="Times New Roman"/>
-                <a:cs typeface="Times New Roman"/>
-              </a:rPr>
-              <a:t>0.827</a:t>
-            </a:r>
-            <a:r>
-              <a:rPr lang="en-US" sz="2400" b="0" i="0" dirty="0">
-                <a:solidFill>
-                  <a:srgbClr val="1E2A32"/>
-                </a:solidFill>
-                <a:latin typeface="Times New Roman"/>
-                <a:cs typeface="Times New Roman"/>
-              </a:rPr>
-              <a:t>); Exploits and Fuzzers were confused 1,287 times</a:t>
+              <a:t>k-NN overlap tracks model confusions (Spearman 0.827); Exploits and Fuzzers were confused 1,287 times</a:t>
             </a:r>
           </a:p>
         </p:txBody>
@@ -8278,8 +7918,8 @@
         </p:nvSpPr>
         <p:spPr>
           <a:xfrm>
-            <a:off x="18415000" y="15494000"/>
-            <a:ext cx="8458200" cy="508000"/>
+            <a:off x="18415000" y="5257800"/>
+            <a:ext cx="8458200" cy="461665"/>
           </a:xfrm>
           <a:prstGeom prst="rect">
             <a:avLst/>
@@ -8291,7 +7931,7 @@
         </p:spPr>
         <p:txBody>
           <a:bodyPr wrap="square" lIns="0" tIns="0" rIns="0" bIns="0" rtlCol="0" anchor="t">
-            <a:noAutofit/>
+            <a:spAutoFit/>
           </a:bodyPr>
           <a:lstStyle/>
           <a:p>
@@ -8305,7 +7945,7 @@
               <a:buNone/>
             </a:pPr>
             <a:r>
-              <a:rPr lang="en-US" sz="2800" b="1" i="0" dirty="0">
+              <a:rPr lang="en-US" sz="3000" b="1" i="0" dirty="0">
                 <a:solidFill>
                   <a:srgbClr val="1E3A52"/>
                 </a:solidFill>
@@ -8325,7 +7965,7 @@
         </p:nvSpPr>
         <p:spPr>
           <a:xfrm>
-            <a:off x="18415000" y="25273000"/>
+            <a:off x="18415000" y="27709433"/>
             <a:ext cx="8458200" cy="736600"/>
           </a:xfrm>
           <a:prstGeom prst="roundRect">
@@ -8356,14 +7996,14 @@
               <a:buNone/>
             </a:pPr>
             <a:r>
-              <a:rPr lang="en-US" sz="2400" b="1" i="0" dirty="0">
+              <a:rPr lang="en-US" sz="3200" b="1" i="0" dirty="0">
                 <a:solidFill>
                   <a:srgbClr val="FFFFFF"/>
                 </a:solidFill>
                 <a:latin typeface="Times New Roman"/>
                 <a:cs typeface="Times New Roman"/>
               </a:rPr>
-              <a:t>7   CONCLUSION</a:t>
+              <a:t>8   CONCLUSION</a:t>
             </a:r>
           </a:p>
         </p:txBody>
@@ -8376,8 +8016,8 @@
         </p:nvSpPr>
         <p:spPr>
           <a:xfrm>
-            <a:off x="18415000" y="26238200"/>
-            <a:ext cx="8458200" cy="5080000"/>
+            <a:off x="18415000" y="28674633"/>
+            <a:ext cx="8458200" cy="2421176"/>
           </a:xfrm>
           <a:prstGeom prst="rect">
             <a:avLst/>
@@ -8389,11 +8029,11 @@
         </p:spPr>
         <p:txBody>
           <a:bodyPr wrap="square" lIns="0" tIns="0" rIns="0" bIns="0" rtlCol="0" anchor="t">
-            <a:noAutofit/>
+            <a:spAutoFit/>
           </a:bodyPr>
           <a:lstStyle/>
           <a:p>
-            <a:pPr marL="381000" indent="-381000" algn="l">
+            <a:pPr marL="381000" indent="-381000" algn="just">
               <a:spcBef>
                 <a:spcPts val="0"/>
               </a:spcBef>
@@ -8414,51 +8054,11 @@
                 <a:latin typeface="Times New Roman"/>
                 <a:cs typeface="Times New Roman"/>
               </a:rPr>
-              <a:t>Final system: </a:t>
-            </a:r>
-            <a:r>
-              <a:rPr lang="en-US" sz="2400" b="1" i="0" dirty="0">
-                <a:solidFill>
-                  <a:srgbClr val="1E2A32"/>
-                </a:solidFill>
-                <a:latin typeface="Times New Roman"/>
-                <a:cs typeface="Times New Roman"/>
-              </a:rPr>
-              <a:t>macro-F1 0.689</a:t>
-            </a:r>
-            <a:r>
-              <a:rPr lang="en-US" sz="2400" b="0" i="0" dirty="0">
-                <a:solidFill>
-                  <a:srgbClr val="1E2A32"/>
-                </a:solidFill>
-                <a:latin typeface="Times New Roman"/>
-                <a:cs typeface="Times New Roman"/>
-              </a:rPr>
-              <a:t> and </a:t>
-            </a:r>
-            <a:r>
-              <a:rPr lang="en-US" sz="2400" b="1" i="0" dirty="0">
-                <a:solidFill>
-                  <a:srgbClr val="1E2A32"/>
-                </a:solidFill>
-                <a:latin typeface="Times New Roman"/>
-                <a:cs typeface="Times New Roman"/>
-              </a:rPr>
-              <a:t>98.66% accuracy</a:t>
-            </a:r>
-            <a:r>
-              <a:rPr lang="en-US" sz="2400" b="0" i="0" dirty="0">
-                <a:solidFill>
-                  <a:srgbClr val="1E2A32"/>
-                </a:solidFill>
-                <a:latin typeface="Times New Roman"/>
-                <a:cs typeface="Times New Roman"/>
-              </a:rPr>
-              <a:t> at the realistic 97.5% benign base rate</a:t>
-            </a:r>
-          </a:p>
-          <a:p>
-            <a:pPr marL="381000" indent="-381000" algn="l">
+              <a:t>Final system: macro-F1 0.689 and 98.66% accuracy at the realistic 97.5% benign base rate</a:t>
+            </a:r>
+          </a:p>
+          <a:p>
+            <a:pPr marL="381000" indent="-381000" algn="just">
               <a:spcBef>
                 <a:spcPts val="0"/>
               </a:spcBef>
@@ -8472,33 +8072,23 @@
               <a:buChar char="▪"/>
             </a:pPr>
             <a:r>
-              <a:rPr lang="en-US" sz="2400" b="1" i="0" dirty="0">
+              <a:rPr lang="en-US" sz="2400" b="0" i="0" dirty="0">
                 <a:solidFill>
                   <a:srgbClr val="1E2A32"/>
                 </a:solidFill>
                 <a:latin typeface="Times New Roman"/>
                 <a:cs typeface="Times New Roman"/>
               </a:rPr>
-              <a:t>Moderate rebalancing</a:t>
-            </a:r>
-            <a:r>
-              <a:rPr lang="en-US" sz="2400" b="0" i="0" dirty="0">
-                <a:solidFill>
-                  <a:srgbClr val="1E2A32"/>
-                </a:solidFill>
-                <a:latin typeface="Times New Roman"/>
-                <a:cs typeface="Times New Roman"/>
-              </a:rPr>
-              <a:t> (α = 0.25, +0.039) beat full SMOTE and "balanced" weights</a:t>
-            </a:r>
-          </a:p>
-          <a:p>
-            <a:pPr marL="381000" indent="-381000" algn="l">
-              <a:spcBef>
-                <a:spcPts val="0"/>
-              </a:spcBef>
-              <a:spcAft>
-                <a:spcPts val="800"/>
+              <a:t>Moderate rebalancing (α = 0.25, +0.039) beat full SMOTE and "balanced" weights</a:t>
+            </a:r>
+          </a:p>
+          <a:p>
+            <a:pPr marL="381000" indent="-381000" algn="just">
+              <a:spcBef>
+                <a:spcPts val="0"/>
+              </a:spcBef>
+              <a:spcAft>
+                <a:spcPts val="0"/>
               </a:spcAft>
               <a:buClr>
                 <a:srgbClr val="D98E45"/>
@@ -8507,94 +8097,14 @@
               <a:buChar char="▪"/>
             </a:pPr>
             <a:r>
-              <a:rPr lang="en-US" sz="2400" b="1" i="0" dirty="0">
+              <a:rPr lang="en-US" sz="2400" b="0" i="0" dirty="0">
                 <a:solidFill>
                   <a:srgbClr val="1E2A32"/>
                 </a:solidFill>
                 <a:latin typeface="Times New Roman"/>
                 <a:cs typeface="Times New Roman"/>
               </a:rPr>
-              <a:t>Information beat model capacity</a:t>
-            </a:r>
-            <a:r>
-              <a:rPr lang="en-US" sz="2400" b="0" i="0" dirty="0">
-                <a:solidFill>
-                  <a:srgbClr val="1E2A32"/>
-                </a:solidFill>
-                <a:latin typeface="Times New Roman"/>
-                <a:cs typeface="Times New Roman"/>
-              </a:rPr>
-              <a:t>: service identity added +0.098; tuning gave no established gain</a:t>
-            </a:r>
-          </a:p>
-          <a:p>
-            <a:pPr marL="381000" indent="-381000" algn="l">
-              <a:spcBef>
-                <a:spcPts val="0"/>
-              </a:spcBef>
-              <a:spcAft>
-                <a:spcPts val="800"/>
-              </a:spcAft>
-              <a:buClr>
-                <a:srgbClr val="D98E45"/>
-              </a:buClr>
-              <a:buFont typeface="Arial"/>
-              <a:buChar char="▪"/>
-            </a:pPr>
-            <a:r>
-              <a:rPr lang="en-US" sz="2400" b="1" i="0" dirty="0">
-                <a:solidFill>
-                  <a:srgbClr val="1E2A32"/>
-                </a:solidFill>
-                <a:latin typeface="Times New Roman"/>
-                <a:cs typeface="Times New Roman"/>
-              </a:rPr>
-              <a:t>Limitations:</a:t>
-            </a:r>
-            <a:r>
-              <a:rPr lang="en-US" sz="2400" b="0" i="0" dirty="0">
-                <a:solidFill>
-                  <a:srgbClr val="1E2A32"/>
-                </a:solidFill>
-                <a:latin typeface="Times New Roman"/>
-                <a:cs typeface="Times New Roman"/>
-              </a:rPr>
-              <a:t> single testbed, flow features only, weak Analysis and Worms detection</a:t>
-            </a:r>
-          </a:p>
-          <a:p>
-            <a:pPr marL="381000" indent="-381000" algn="l">
-              <a:spcBef>
-                <a:spcPts val="0"/>
-              </a:spcBef>
-              <a:spcAft>
-                <a:spcPts val="0"/>
-              </a:spcAft>
-              <a:buClr>
-                <a:srgbClr val="D98E45"/>
-              </a:buClr>
-              <a:buFont typeface="Arial"/>
-              <a:buChar char="▪"/>
-            </a:pPr>
-            <a:r>
-              <a:rPr lang="en-US" sz="2400" b="1" i="0" dirty="0">
-                <a:solidFill>
-                  <a:srgbClr val="1E2A32"/>
-                </a:solidFill>
-                <a:latin typeface="Times New Roman"/>
-                <a:cs typeface="Times New Roman"/>
-              </a:rPr>
-              <a:t>Future work:</a:t>
-            </a:r>
-            <a:r>
-              <a:rPr lang="en-US" sz="2400" b="0" i="0" dirty="0">
-                <a:solidFill>
-                  <a:srgbClr val="1E2A32"/>
-                </a:solidFill>
-                <a:latin typeface="Times New Roman"/>
-                <a:cs typeface="Times New Roman"/>
-              </a:rPr>
-              <a:t> payload features, cross-network tests, SHAP, adversarial training</a:t>
+              <a:t>Information beat model capacity: service identity added +0.098; tuning gave no established gain</a:t>
             </a:r>
           </a:p>
         </p:txBody>
@@ -8607,7 +8117,7 @@
         </p:nvSpPr>
         <p:spPr>
           <a:xfrm>
-            <a:off x="18415000" y="31623000"/>
+            <a:off x="18415000" y="31426009"/>
             <a:ext cx="8458200" cy="736600"/>
           </a:xfrm>
           <a:prstGeom prst="roundRect">
@@ -8638,14 +8148,14 @@
               <a:buNone/>
             </a:pPr>
             <a:r>
-              <a:rPr lang="en-US" sz="2400" b="1" i="0" dirty="0">
+              <a:rPr lang="en-US" sz="3200" b="1" i="0" dirty="0">
                 <a:solidFill>
                   <a:srgbClr val="FFFFFF"/>
                 </a:solidFill>
                 <a:latin typeface="Times New Roman"/>
                 <a:cs typeface="Times New Roman"/>
               </a:rPr>
-              <a:t>8   REFERENCES</a:t>
+              <a:t>9   REFERENCES</a:t>
             </a:r>
           </a:p>
         </p:txBody>
@@ -8658,8 +8168,8 @@
         </p:nvSpPr>
         <p:spPr>
           <a:xfrm>
-            <a:off x="18415000" y="32562800"/>
-            <a:ext cx="8458200" cy="5461000"/>
+            <a:off x="18415000" y="32365809"/>
+            <a:ext cx="8458200" cy="6478697"/>
           </a:xfrm>
           <a:prstGeom prst="rect">
             <a:avLst/>
@@ -8671,11 +8181,11 @@
         </p:spPr>
         <p:txBody>
           <a:bodyPr wrap="square" lIns="0" tIns="0" rIns="0" bIns="0" rtlCol="0" anchor="t">
-            <a:noAutofit/>
+            <a:spAutoFit/>
           </a:bodyPr>
           <a:lstStyle/>
           <a:p>
-            <a:pPr marL="355600" indent="-355600" algn="l">
+            <a:pPr marL="355600" indent="-355600" algn="just">
               <a:spcBef>
                 <a:spcPts val="0"/>
               </a:spcBef>
@@ -8689,7 +8199,7 @@
               <a:buAutoNum type="arabicPeriod"/>
             </a:pPr>
             <a:r>
-              <a:rPr lang="en-US" sz="2000" b="0" i="0" dirty="0">
+              <a:rPr lang="en-US" sz="2200" b="0" i="0" dirty="0">
                 <a:solidFill>
                   <a:srgbClr val="1E2A32"/>
                 </a:solidFill>
@@ -8700,7 +8210,7 @@
             </a:r>
           </a:p>
           <a:p>
-            <a:pPr marL="355600" indent="-355600" algn="l">
+            <a:pPr marL="355600" indent="-355600" algn="just">
               <a:spcBef>
                 <a:spcPts val="0"/>
               </a:spcBef>
@@ -8714,7 +8224,7 @@
               <a:buAutoNum type="arabicPeriod"/>
             </a:pPr>
             <a:r>
-              <a:rPr lang="en-US" sz="2000" b="0" i="0" dirty="0">
+              <a:rPr lang="en-US" sz="2200" b="0" i="0" dirty="0">
                 <a:solidFill>
                   <a:srgbClr val="1E2A32"/>
                 </a:solidFill>
@@ -8725,7 +8235,7 @@
             </a:r>
           </a:p>
           <a:p>
-            <a:pPr marL="355600" indent="-355600" algn="l">
+            <a:pPr marL="355600" indent="-355600" algn="just">
               <a:spcBef>
                 <a:spcPts val="0"/>
               </a:spcBef>
@@ -8739,7 +8249,7 @@
               <a:buAutoNum type="arabicPeriod"/>
             </a:pPr>
             <a:r>
-              <a:rPr lang="en-US" sz="2000" b="0" i="0" dirty="0">
+              <a:rPr lang="en-US" sz="2200" b="0" i="0" dirty="0">
                 <a:solidFill>
                   <a:srgbClr val="1E2A32"/>
                 </a:solidFill>
@@ -8750,7 +8260,7 @@
             </a:r>
           </a:p>
           <a:p>
-            <a:pPr marL="355600" indent="-355600" algn="l">
+            <a:pPr marL="355600" indent="-355600" algn="just">
               <a:spcBef>
                 <a:spcPts val="0"/>
               </a:spcBef>
@@ -8764,7 +8274,7 @@
               <a:buAutoNum type="arabicPeriod"/>
             </a:pPr>
             <a:r>
-              <a:rPr lang="en-US" sz="2000" b="0" i="0" dirty="0">
+              <a:rPr lang="en-US" sz="2200" b="0" i="0" dirty="0">
                 <a:solidFill>
                   <a:srgbClr val="1E2A32"/>
                 </a:solidFill>
@@ -8775,7 +8285,7 @@
             </a:r>
           </a:p>
           <a:p>
-            <a:pPr marL="355600" indent="-355600" algn="l">
+            <a:pPr marL="355600" indent="-355600" algn="just">
               <a:spcBef>
                 <a:spcPts val="0"/>
               </a:spcBef>
@@ -8789,7 +8299,7 @@
               <a:buAutoNum type="arabicPeriod"/>
             </a:pPr>
             <a:r>
-              <a:rPr lang="en-US" sz="2000" b="0" i="0" dirty="0">
+              <a:rPr lang="en-US" sz="2200" b="0" i="0" dirty="0">
                 <a:solidFill>
                   <a:srgbClr val="1E2A32"/>
                 </a:solidFill>
@@ -8800,7 +8310,7 @@
             </a:r>
           </a:p>
           <a:p>
-            <a:pPr marL="355600" indent="-355600" algn="l">
+            <a:pPr marL="355600" indent="-355600" algn="just">
               <a:spcBef>
                 <a:spcPts val="0"/>
               </a:spcBef>
@@ -8814,7 +8324,7 @@
               <a:buAutoNum type="arabicPeriod"/>
             </a:pPr>
             <a:r>
-              <a:rPr lang="en-US" sz="2000" b="0" i="0" dirty="0">
+              <a:rPr lang="en-US" sz="2200" b="0" i="0" dirty="0">
                 <a:solidFill>
                   <a:srgbClr val="1E2A32"/>
                 </a:solidFill>
@@ -8825,7 +8335,7 @@
             </a:r>
           </a:p>
           <a:p>
-            <a:pPr marL="355600" indent="-355600" algn="l">
+            <a:pPr marL="355600" indent="-355600" algn="just">
               <a:spcBef>
                 <a:spcPts val="0"/>
               </a:spcBef>
@@ -8839,7 +8349,7 @@
               <a:buAutoNum type="arabicPeriod"/>
             </a:pPr>
             <a:r>
-              <a:rPr lang="en-US" sz="2000" b="0" i="0" dirty="0">
+              <a:rPr lang="en-US" sz="2200" b="0" i="0" dirty="0">
                 <a:solidFill>
                   <a:srgbClr val="1E2A32"/>
                 </a:solidFill>
@@ -8859,8 +8369,8 @@
         </p:nvSpPr>
         <p:spPr>
           <a:xfrm>
-            <a:off x="18415000" y="38811200"/>
-            <a:ext cx="8458200" cy="3429000"/>
+            <a:off x="18415000" y="39123907"/>
+            <a:ext cx="8458200" cy="2955925"/>
           </a:xfrm>
           <a:prstGeom prst="roundRect">
             <a:avLst>
@@ -8876,7 +8386,7 @@
         </p:spPr>
         <p:txBody>
           <a:bodyPr wrap="square" lIns="279400" tIns="304800" rIns="279400" bIns="304800" rtlCol="0" anchor="ctr" anchorCtr="0">
-            <a:noAutofit/>
+            <a:spAutoFit/>
           </a:bodyPr>
           <a:lstStyle/>
           <a:p>
@@ -8890,7 +8400,7 @@
               <a:buNone/>
             </a:pPr>
             <a:r>
-              <a:rPr lang="en-US" sz="2400" b="1" i="0" dirty="0">
+              <a:rPr lang="en-US" sz="3000" b="1" i="0" dirty="0">
                 <a:solidFill>
                   <a:srgbClr val="1E3A52"/>
                 </a:solidFill>
@@ -8927,11 +8437,17 @@
         <p:nvGraphicFramePr>
           <p:cNvPr id="2514" name="Chart"/>
           <p:cNvGraphicFramePr/>
-          <p:nvPr/>
+          <p:nvPr>
+            <p:extLst>
+              <p:ext uri="{D42A27DB-BD31-4B8C-83A1-F6EECF244321}">
+                <p14:modId xmlns:p14="http://schemas.microsoft.com/office/powerpoint/2010/main" val="2275152952"/>
+              </p:ext>
+            </p:extLst>
+          </p:nvPr>
         </p:nvGraphicFramePr>
         <p:xfrm>
-          <a:off x="18415000" y="6807200"/>
-          <a:ext cx="8458200" cy="5715000"/>
+          <a:off x="18415000" y="15528883"/>
+          <a:ext cx="8458200" cy="5080000"/>
         </p:xfrm>
         <a:graphic>
           <a:graphicData uri="http://schemas.openxmlformats.org/drawingml/2006/chart">
@@ -8947,8 +8463,8 @@
         </p:nvSpPr>
         <p:spPr>
           <a:xfrm>
-            <a:off x="558800" y="17018000"/>
-            <a:ext cx="2362200" cy="2286000"/>
+            <a:off x="558800" y="16713200"/>
+            <a:ext cx="2362200" cy="2438400"/>
           </a:xfrm>
           <a:prstGeom prst="roundRect">
             <a:avLst>
@@ -9005,7 +8521,7 @@
               <a:buNone/>
             </a:pPr>
             <a:r>
-              <a:rPr lang="en-US" sz="2100" b="1" i="0" dirty="0">
+              <a:rPr lang="en-US" sz="2200" b="1" i="0" dirty="0">
                 <a:solidFill>
                   <a:srgbClr val="1E3A52"/>
                 </a:solidFill>
@@ -9029,7 +8545,7 @@
               <a:buNone/>
             </a:pPr>
             <a:r>
-              <a:rPr lang="en-US" sz="1900" b="0" i="0" dirty="0">
+              <a:rPr lang="en-US" sz="2200" b="0" i="0" dirty="0">
                 <a:solidFill>
                   <a:srgbClr val="1E2A32"/>
                 </a:solidFill>
@@ -9049,8 +8565,8 @@
         </p:nvSpPr>
         <p:spPr>
           <a:xfrm>
-            <a:off x="3606800" y="17018000"/>
-            <a:ext cx="2362200" cy="2286000"/>
+            <a:off x="3606800" y="16713200"/>
+            <a:ext cx="2362200" cy="2438400"/>
           </a:xfrm>
           <a:prstGeom prst="roundRect">
             <a:avLst>
@@ -9107,7 +8623,7 @@
               <a:buNone/>
             </a:pPr>
             <a:r>
-              <a:rPr lang="en-US" sz="2100" b="1" i="0" dirty="0">
+              <a:rPr lang="en-US" sz="2200" b="1" i="0" dirty="0">
                 <a:solidFill>
                   <a:srgbClr val="1E3A52"/>
                 </a:solidFill>
@@ -9131,7 +8647,7 @@
               <a:buNone/>
             </a:pPr>
             <a:r>
-              <a:rPr lang="en-US" sz="1900" b="0" i="0" dirty="0">
+              <a:rPr lang="en-US" sz="2200" b="0" i="0" dirty="0">
                 <a:solidFill>
                   <a:srgbClr val="1E2A32"/>
                 </a:solidFill>
@@ -9151,8 +8667,8 @@
         </p:nvSpPr>
         <p:spPr>
           <a:xfrm>
-            <a:off x="6654800" y="17018000"/>
-            <a:ext cx="2362200" cy="2286000"/>
+            <a:off x="6654800" y="16713200"/>
+            <a:ext cx="2362200" cy="2438400"/>
           </a:xfrm>
           <a:prstGeom prst="roundRect">
             <a:avLst>
@@ -9209,7 +8725,7 @@
               <a:buNone/>
             </a:pPr>
             <a:r>
-              <a:rPr lang="en-US" sz="2100" b="1" i="0" dirty="0">
+              <a:rPr lang="en-US" sz="2200" b="1" i="0" dirty="0">
                 <a:solidFill>
                   <a:srgbClr val="1E3A52"/>
                 </a:solidFill>
@@ -9233,7 +8749,7 @@
               <a:buNone/>
             </a:pPr>
             <a:r>
-              <a:rPr lang="en-US" sz="1900" b="0" i="0" dirty="0">
+              <a:rPr lang="en-US" sz="2200" b="0" i="0" dirty="0">
                 <a:solidFill>
                   <a:srgbClr val="1E2A32"/>
                 </a:solidFill>
@@ -9253,8 +8769,8 @@
         </p:nvSpPr>
         <p:spPr>
           <a:xfrm>
-            <a:off x="558800" y="19786600"/>
-            <a:ext cx="2362200" cy="2286000"/>
+            <a:off x="558800" y="19583400"/>
+            <a:ext cx="2362200" cy="2438400"/>
           </a:xfrm>
           <a:prstGeom prst="roundRect">
             <a:avLst>
@@ -9311,7 +8827,7 @@
               <a:buNone/>
             </a:pPr>
             <a:r>
-              <a:rPr lang="en-US" sz="2100" b="1" i="0" dirty="0">
+              <a:rPr lang="en-US" sz="2200" b="1" i="0" dirty="0">
                 <a:solidFill>
                   <a:srgbClr val="FFFFFF"/>
                 </a:solidFill>
@@ -9335,7 +8851,7 @@
               <a:buNone/>
             </a:pPr>
             <a:r>
-              <a:rPr lang="en-US" sz="1900" b="0" i="0" dirty="0">
+              <a:rPr lang="en-US" sz="2200" b="0" i="0" dirty="0">
                 <a:solidFill>
                   <a:srgbClr val="DCE6EC"/>
                 </a:solidFill>
@@ -9355,8 +8871,8 @@
         </p:nvSpPr>
         <p:spPr>
           <a:xfrm>
-            <a:off x="3606800" y="19786600"/>
-            <a:ext cx="2362200" cy="2286000"/>
+            <a:off x="3606800" y="19583400"/>
+            <a:ext cx="2362200" cy="2438400"/>
           </a:xfrm>
           <a:prstGeom prst="roundRect">
             <a:avLst>
@@ -9413,7 +8929,7 @@
               <a:buNone/>
             </a:pPr>
             <a:r>
-              <a:rPr lang="en-US" sz="2100" b="1" i="0" dirty="0">
+              <a:rPr lang="en-US" sz="2200" b="1" i="0" dirty="0">
                 <a:solidFill>
                   <a:srgbClr val="1E3A52"/>
                 </a:solidFill>
@@ -9437,7 +8953,7 @@
               <a:buNone/>
             </a:pPr>
             <a:r>
-              <a:rPr lang="en-US" sz="1900" b="0" i="0" dirty="0">
+              <a:rPr lang="en-US" sz="2200" b="0" i="0" dirty="0">
                 <a:solidFill>
                   <a:srgbClr val="1E2A32"/>
                 </a:solidFill>
@@ -9457,8 +8973,8 @@
         </p:nvSpPr>
         <p:spPr>
           <a:xfrm>
-            <a:off x="6654800" y="19786600"/>
-            <a:ext cx="2362200" cy="2286000"/>
+            <a:off x="6654800" y="19583400"/>
+            <a:ext cx="2362200" cy="2438400"/>
           </a:xfrm>
           <a:prstGeom prst="roundRect">
             <a:avLst>
@@ -9515,7 +9031,7 @@
               <a:buNone/>
             </a:pPr>
             <a:r>
-              <a:rPr lang="en-US" sz="2100" b="1" i="0" dirty="0">
+              <a:rPr lang="en-US" sz="2200" b="1" i="0" dirty="0">
                 <a:solidFill>
                   <a:srgbClr val="1E3A52"/>
                 </a:solidFill>
@@ -9539,7 +9055,7 @@
               <a:buNone/>
             </a:pPr>
             <a:r>
-              <a:rPr lang="en-US" sz="1900" b="0" i="0" dirty="0">
+              <a:rPr lang="en-US" sz="2200" b="0" i="0" dirty="0">
                 <a:solidFill>
                   <a:srgbClr val="1E2A32"/>
                 </a:solidFill>
@@ -9559,7 +9075,7 @@
         </p:nvCxnSpPr>
         <p:spPr>
           <a:xfrm>
-            <a:off x="3022600" y="18161000"/>
+            <a:off x="3022600" y="17932400"/>
             <a:ext cx="482600" cy="0"/>
           </a:xfrm>
           <a:prstGeom prst="line">
@@ -9581,7 +9097,7 @@
         </p:nvCxnSpPr>
         <p:spPr>
           <a:xfrm>
-            <a:off x="6070600" y="18161000"/>
+            <a:off x="6070600" y="17932400"/>
             <a:ext cx="482600" cy="0"/>
           </a:xfrm>
           <a:prstGeom prst="line">
@@ -9603,7 +9119,7 @@
         </p:nvCxnSpPr>
         <p:spPr>
           <a:xfrm>
-            <a:off x="3022600" y="20929600"/>
+            <a:off x="3022600" y="20802600"/>
             <a:ext cx="482600" cy="0"/>
           </a:xfrm>
           <a:prstGeom prst="line">
@@ -9625,7 +9141,7 @@
         </p:nvCxnSpPr>
         <p:spPr>
           <a:xfrm>
-            <a:off x="6070600" y="20929600"/>
+            <a:off x="6070600" y="20802600"/>
             <a:ext cx="482600" cy="0"/>
           </a:xfrm>
           <a:prstGeom prst="line">
@@ -9647,7 +9163,7 @@
         </p:nvSpPr>
         <p:spPr>
           <a:xfrm>
-            <a:off x="1739900" y="19354800"/>
+            <a:off x="1739900" y="19177000"/>
             <a:ext cx="6096000" cy="381000"/>
           </a:xfrm>
           <a:custGeom>
@@ -9732,7 +9248,7 @@
               <a:buNone/>
             </a:pPr>
             <a:r>
-              <a:rPr lang="en-US" sz="2100" b="1" i="0" dirty="0">
+              <a:rPr lang="en-US" sz="2200" b="1" i="0" dirty="0">
                 <a:solidFill>
                   <a:srgbClr val="FFFFFF"/>
                 </a:solidFill>
@@ -9756,7 +9272,7 @@
               <a:buNone/>
             </a:pPr>
             <a:r>
-              <a:rPr lang="en-US" sz="1900" b="0" i="0" dirty="0">
+              <a:rPr lang="en-US" sz="2200" b="0" i="0" dirty="0">
                 <a:solidFill>
                   <a:srgbClr val="CFE0E9"/>
                 </a:solidFill>
@@ -9834,7 +9350,7 @@
               <a:buNone/>
             </a:pPr>
             <a:r>
-              <a:rPr lang="en-US" sz="2100" b="1" i="0" dirty="0">
+              <a:rPr lang="en-US" sz="2200" b="1" i="0" dirty="0">
                 <a:solidFill>
                   <a:srgbClr val="1E3A52"/>
                 </a:solidFill>
@@ -9858,7 +9374,7 @@
               <a:buNone/>
             </a:pPr>
             <a:r>
-              <a:rPr lang="en-US" sz="1900" b="0" i="0" dirty="0">
+              <a:rPr lang="en-US" sz="2200" b="0" i="0" dirty="0">
                 <a:solidFill>
                   <a:srgbClr val="1E2A32"/>
                 </a:solidFill>
@@ -9913,7 +9429,7 @@
         </p:spPr>
         <p:txBody>
           <a:bodyPr wrap="square" lIns="0" tIns="25400" rIns="0" bIns="25400" rtlCol="0" anchor="ctr">
-            <a:noAutofit/>
+            <a:spAutoFit/>
           </a:bodyPr>
           <a:lstStyle/>
           <a:p>
@@ -9930,7 +9446,7 @@
               <a:buNone/>
             </a:pPr>
             <a:r>
-              <a:rPr lang="en-US" sz="2100" b="1" i="0" dirty="0">
+              <a:rPr lang="en-US" sz="2200" b="1" i="0" dirty="0">
                 <a:solidFill>
                   <a:srgbClr val="D98E45"/>
                 </a:solidFill>
@@ -9954,7 +9470,7 @@
               <a:buNone/>
             </a:pPr>
             <a:r>
-              <a:rPr lang="en-US" sz="1800" b="0" i="0" dirty="0">
+              <a:rPr lang="en-US" sz="2200" b="0" i="0" dirty="0">
                 <a:solidFill>
                   <a:srgbClr val="4A5A68"/>
                 </a:solidFill>
@@ -10032,7 +9548,7 @@
               <a:buNone/>
             </a:pPr>
             <a:r>
-              <a:rPr lang="en-US" sz="2100" b="1" i="0" dirty="0">
+              <a:rPr lang="en-US" sz="2200" b="1" i="0" dirty="0">
                 <a:solidFill>
                   <a:srgbClr val="1E3A52"/>
                 </a:solidFill>
@@ -10056,7 +9572,7 @@
               <a:buNone/>
             </a:pPr>
             <a:r>
-              <a:rPr lang="en-US" sz="1900" b="0" i="0" dirty="0">
+              <a:rPr lang="en-US" sz="2200" b="0" i="0" dirty="0">
                 <a:solidFill>
                   <a:srgbClr val="1E2A32"/>
                 </a:solidFill>
@@ -10111,7 +9627,7 @@
         </p:spPr>
         <p:txBody>
           <a:bodyPr wrap="square" lIns="0" tIns="25400" rIns="0" bIns="25400" rtlCol="0" anchor="ctr">
-            <a:noAutofit/>
+            <a:spAutoFit/>
           </a:bodyPr>
           <a:lstStyle/>
           <a:p>
@@ -10128,7 +9644,7 @@
               <a:buNone/>
             </a:pPr>
             <a:r>
-              <a:rPr lang="en-US" sz="2100" b="1" i="0" dirty="0">
+              <a:rPr lang="en-US" sz="2200" b="1" i="0" dirty="0">
                 <a:solidFill>
                   <a:srgbClr val="D98E45"/>
                 </a:solidFill>
@@ -10152,7 +9668,7 @@
               <a:buNone/>
             </a:pPr>
             <a:r>
-              <a:rPr lang="en-US" sz="1800" b="0" i="0" dirty="0">
+              <a:rPr lang="en-US" sz="2200" b="0" i="0" dirty="0">
                 <a:solidFill>
                   <a:srgbClr val="4A5A68"/>
                 </a:solidFill>
@@ -10230,7 +9746,7 @@
               <a:buNone/>
             </a:pPr>
             <a:r>
-              <a:rPr lang="en-US" sz="2100" b="1" i="0" dirty="0">
+              <a:rPr lang="en-US" sz="2200" b="1" i="0" dirty="0">
                 <a:solidFill>
                   <a:srgbClr val="1E3A52"/>
                 </a:solidFill>
@@ -10254,7 +9770,7 @@
               <a:buNone/>
             </a:pPr>
             <a:r>
-              <a:rPr lang="en-US" sz="1900" b="0" i="0" dirty="0">
+              <a:rPr lang="en-US" sz="2200" b="0" i="0" dirty="0">
                 <a:solidFill>
                   <a:srgbClr val="1E2A32"/>
                 </a:solidFill>
@@ -10309,7 +9825,7 @@
         </p:spPr>
         <p:txBody>
           <a:bodyPr wrap="square" lIns="0" tIns="25400" rIns="0" bIns="25400" rtlCol="0" anchor="ctr">
-            <a:noAutofit/>
+            <a:spAutoFit/>
           </a:bodyPr>
           <a:lstStyle/>
           <a:p>
@@ -10326,7 +9842,7 @@
               <a:buNone/>
             </a:pPr>
             <a:r>
-              <a:rPr lang="en-US" sz="2100" b="1" i="0" dirty="0">
+              <a:rPr lang="en-US" sz="2200" b="1" i="0" dirty="0">
                 <a:solidFill>
                   <a:srgbClr val="D98E45"/>
                 </a:solidFill>
@@ -10350,7 +9866,7 @@
               <a:buNone/>
             </a:pPr>
             <a:r>
-              <a:rPr lang="en-US" sz="1800" b="0" i="0" dirty="0">
+              <a:rPr lang="en-US" sz="2200" b="0" i="0" dirty="0">
                 <a:solidFill>
                   <a:srgbClr val="4A5A68"/>
                 </a:solidFill>
@@ -10428,7 +9944,7 @@
               <a:buNone/>
             </a:pPr>
             <a:r>
-              <a:rPr lang="en-US" sz="2100" b="1" i="0" dirty="0">
+              <a:rPr lang="en-US" sz="2200" b="1" i="0" dirty="0">
                 <a:solidFill>
                   <a:srgbClr val="1E3A52"/>
                 </a:solidFill>
@@ -10452,7 +9968,7 @@
               <a:buNone/>
             </a:pPr>
             <a:r>
-              <a:rPr lang="en-US" sz="1900" b="0" i="0" dirty="0">
+              <a:rPr lang="en-US" sz="2200" b="0" i="0" dirty="0">
                 <a:solidFill>
                   <a:srgbClr val="1E2A32"/>
                 </a:solidFill>
@@ -10530,7 +10046,7 @@
               <a:buNone/>
             </a:pPr>
             <a:r>
-              <a:rPr lang="en-US" sz="2100" b="1" i="0" dirty="0">
+              <a:rPr lang="en-US" sz="2200" b="1" i="0" dirty="0">
                 <a:solidFill>
                   <a:srgbClr val="1E3A52"/>
                 </a:solidFill>
@@ -10554,7 +10070,7 @@
               <a:buNone/>
             </a:pPr>
             <a:r>
-              <a:rPr lang="en-US" sz="1900" b="0" i="0" dirty="0">
+              <a:rPr lang="en-US" sz="2200" b="0" i="0" dirty="0">
                 <a:solidFill>
                   <a:srgbClr val="1E2A32"/>
                 </a:solidFill>
@@ -10596,8 +10112,8 @@
         </p:nvSpPr>
         <p:spPr>
           <a:xfrm>
-            <a:off x="7620000" y="31369000"/>
-            <a:ext cx="1397000" cy="1016000"/>
+            <a:off x="7620000" y="31529725"/>
+            <a:ext cx="1397000" cy="694549"/>
           </a:xfrm>
           <a:prstGeom prst="rect">
             <a:avLst/>
@@ -10609,7 +10125,7 @@
         </p:spPr>
         <p:txBody>
           <a:bodyPr wrap="square" lIns="0" tIns="25400" rIns="0" bIns="25400" rtlCol="0" anchor="ctr">
-            <a:noAutofit/>
+            <a:spAutoFit/>
           </a:bodyPr>
           <a:lstStyle/>
           <a:p>
@@ -10626,7 +10142,7 @@
               <a:buNone/>
             </a:pPr>
             <a:r>
-              <a:rPr lang="en-US" sz="2100" b="1" i="0" dirty="0">
+              <a:rPr lang="en-US" sz="2200" b="1" i="0" dirty="0">
                 <a:solidFill>
                   <a:srgbClr val="D98E45"/>
                 </a:solidFill>
@@ -10650,7 +10166,7 @@
               <a:buNone/>
             </a:pPr>
             <a:r>
-              <a:rPr lang="en-US" sz="1800" b="0" i="0" dirty="0">
+              <a:rPr lang="en-US" sz="2200" b="0" i="0" dirty="0">
                 <a:solidFill>
                   <a:srgbClr val="4A5A68"/>
                 </a:solidFill>
@@ -10728,7 +10244,7 @@
               <a:buNone/>
             </a:pPr>
             <a:r>
-              <a:rPr lang="en-US" sz="2100" b="1" i="0" dirty="0">
+              <a:rPr lang="en-US" sz="2200" b="1" i="0" dirty="0">
                 <a:solidFill>
                   <a:srgbClr val="1E3A52"/>
                 </a:solidFill>
@@ -10752,7 +10268,7 @@
               <a:buNone/>
             </a:pPr>
             <a:r>
-              <a:rPr lang="en-US" sz="1900" b="0" i="0" dirty="0">
+              <a:rPr lang="en-US" sz="2200" b="0" i="0" dirty="0">
                 <a:solidFill>
                   <a:srgbClr val="1E2A32"/>
                 </a:solidFill>
@@ -10886,25 +10402,31 @@
           <p:cNvGraphicFramePr>
             <a:graphicFrameLocks noGrp="1"/>
           </p:cNvGraphicFramePr>
-          <p:nvPr/>
+          <p:nvPr>
+            <p:extLst>
+              <p:ext uri="{D42A27DB-BD31-4B8C-83A1-F6EECF244321}">
+                <p14:modId xmlns:p14="http://schemas.microsoft.com/office/powerpoint/2010/main" val="4188769396"/>
+              </p:ext>
+            </p:extLst>
+          </p:nvPr>
         </p:nvGraphicFramePr>
         <p:xfrm>
-          <a:off x="18415000" y="16154400"/>
-          <a:ext cx="8458200" cy="4765040"/>
+          <a:off x="18415000" y="5871865"/>
+          <a:ext cx="8458201" cy="4114800"/>
         </p:xfrm>
         <a:graphic>
           <a:graphicData uri="http://schemas.openxmlformats.org/drawingml/2006/table">
             <a:tbl>
               <a:tblPr firstRow="1"/>
               <a:tblGrid>
-                <a:gridCol w="2540000">
+                <a:gridCol w="2616200">
                   <a:extLst>
                     <a:ext uri="{9D8B030D-6E8A-4147-A177-3AD203B41FA5}">
                       <a16:colId xmlns:a16="http://schemas.microsoft.com/office/drawing/2014/main" val="20000"/>
                     </a:ext>
                   </a:extLst>
                 </a:gridCol>
-                <a:gridCol w="1600200">
+                <a:gridCol w="1625600">
                   <a:extLst>
                     <a:ext uri="{9D8B030D-6E8A-4147-A177-3AD203B41FA5}">
                       <a16:colId xmlns:a16="http://schemas.microsoft.com/office/drawing/2014/main" val="20001"/>
@@ -10918,7 +10440,7 @@
                     </a:ext>
                   </a:extLst>
                 </a:gridCol>
-                <a:gridCol w="2895600">
+                <a:gridCol w="2794001">
                   <a:extLst>
                     <a:ext uri="{9D8B030D-6E8A-4147-A177-3AD203B41FA5}">
                       <a16:colId xmlns:a16="http://schemas.microsoft.com/office/drawing/2014/main" val="20003"/>
@@ -10926,7 +10448,7 @@
                   </a:extLst>
                 </a:gridCol>
               </a:tblGrid>
-              <a:tr h="635000">
+              <a:tr h="381000">
                 <a:tc>
                   <a:txBody>
                     <a:bodyPr/>
@@ -10995,10 +10517,14 @@
                     <a:lnT w="0">
                       <a:noFill/>
                     </a:lnT>
-                    <a:lnB w="9525">
+                    <a:lnB w="9525" cap="flat" cmpd="sng" algn="ctr">
                       <a:solidFill>
                         <a:srgbClr val="1E3A52"/>
                       </a:solidFill>
+                      <a:prstDash val="solid"/>
+                      <a:round/>
+                      <a:headEnd type="none" w="med" len="med"/>
+                      <a:tailEnd type="none" w="med" len="med"/>
                     </a:lnB>
                     <a:noFill/>
                   </a:tcPr>
@@ -11085,7 +10611,7 @@
                   </a:ext>
                 </a:extLst>
               </a:tr>
-              <a:tr h="990600">
+              <a:tr h="381000">
                 <a:tc>
                   <a:txBody>
                     <a:bodyPr/>
@@ -11168,10 +10694,14 @@
                       <a:headEnd type="none" w="med" len="med"/>
                       <a:tailEnd type="none" w="med" len="med"/>
                     </a:lnT>
-                    <a:lnB w="9525">
+                    <a:lnB w="9525" cap="flat" cmpd="sng" algn="ctr">
                       <a:solidFill>
                         <a:srgbClr val="D8DEE2"/>
                       </a:solidFill>
+                      <a:prstDash val="solid"/>
+                      <a:round/>
+                      <a:headEnd type="none" w="med" len="med"/>
+                      <a:tailEnd type="none" w="med" len="med"/>
                     </a:lnB>
                     <a:solidFill>
                       <a:srgbClr val="FBEBDD"/>
@@ -11276,7 +10806,7 @@
                   </a:ext>
                 </a:extLst>
               </a:tr>
-              <a:tr h="990600">
+              <a:tr h="381000">
                 <a:tc>
                   <a:txBody>
                     <a:bodyPr/>
@@ -11357,10 +10887,14 @@
                       <a:headEnd type="none" w="med" len="med"/>
                       <a:tailEnd type="none" w="med" len="med"/>
                     </a:lnT>
-                    <a:lnB w="9525">
+                    <a:lnB w="9525" cap="flat" cmpd="sng" algn="ctr">
                       <a:solidFill>
                         <a:srgbClr val="D8DEE2"/>
                       </a:solidFill>
+                      <a:prstDash val="solid"/>
+                      <a:round/>
+                      <a:headEnd type="none" w="med" len="med"/>
+                      <a:tailEnd type="none" w="med" len="med"/>
                     </a:lnB>
                     <a:noFill/>
                   </a:tcPr>
@@ -11459,7 +10993,7 @@
                   </a:ext>
                 </a:extLst>
               </a:tr>
-              <a:tr h="990600">
+              <a:tr h="381000">
                 <a:tc>
                   <a:txBody>
                     <a:bodyPr/>
@@ -11540,10 +11074,14 @@
                       <a:headEnd type="none" w="med" len="med"/>
                       <a:tailEnd type="none" w="med" len="med"/>
                     </a:lnT>
-                    <a:lnB w="9525">
+                    <a:lnB w="9525" cap="flat" cmpd="sng" algn="ctr">
                       <a:solidFill>
                         <a:srgbClr val="D8DEE2"/>
                       </a:solidFill>
+                      <a:prstDash val="solid"/>
+                      <a:round/>
+                      <a:headEnd type="none" w="med" len="med"/>
+                      <a:tailEnd type="none" w="med" len="med"/>
                     </a:lnB>
                     <a:noFill/>
                   </a:tcPr>
@@ -11642,7 +11180,7 @@
                   </a:ext>
                 </a:extLst>
               </a:tr>
-              <a:tr h="990600">
+              <a:tr h="381000">
                 <a:tc>
                   <a:txBody>
                     <a:bodyPr/>
@@ -11837,8 +11375,8 @@
         </p:nvSpPr>
         <p:spPr>
           <a:xfrm>
-            <a:off x="18415000" y="21071840"/>
-            <a:ext cx="8458200" cy="381000"/>
+            <a:off x="18415000" y="10113665"/>
+            <a:ext cx="8458200" cy="338554"/>
           </a:xfrm>
           <a:prstGeom prst="rect">
             <a:avLst/>
@@ -11847,7 +11385,7 @@
         </p:spPr>
         <p:txBody>
           <a:bodyPr wrap="square" lIns="0" tIns="0" rIns="0" bIns="0" rtlCol="0" anchor="t">
-            <a:noAutofit/>
+            <a:spAutoFit/>
           </a:bodyPr>
           <a:lstStyle/>
           <a:p>
@@ -11864,7 +11402,7 @@
               <a:buNone/>
             </a:pPr>
             <a:r>
-              <a:rPr lang="en-US" sz="1900" b="0" i="1" dirty="0">
+              <a:rPr lang="en-US" sz="2200" b="0" i="1" dirty="0">
                 <a:solidFill>
                   <a:srgbClr val="203864"/>
                 </a:solidFill>
@@ -11884,8 +11422,8 @@
         </p:nvSpPr>
         <p:spPr>
           <a:xfrm>
-            <a:off x="18415000" y="21656040"/>
-            <a:ext cx="8458200" cy="3175000"/>
+            <a:off x="18415000" y="10596265"/>
+            <a:ext cx="8458200" cy="2318583"/>
           </a:xfrm>
           <a:prstGeom prst="rect">
             <a:avLst/>
@@ -11894,11 +11432,11 @@
         </p:spPr>
         <p:txBody>
           <a:bodyPr wrap="square" lIns="0" tIns="0" rIns="0" bIns="0" rtlCol="0" anchor="t">
-            <a:noAutofit/>
+            <a:spAutoFit/>
           </a:bodyPr>
           <a:lstStyle/>
           <a:p>
-            <a:pPr marL="381000" indent="-381000" algn="l">
+            <a:pPr marL="381000" indent="-381000" algn="just">
               <a:lnSpc>
                 <a:spcPct val="100000"/>
               </a:lnSpc>
@@ -11922,31 +11460,11 @@
                 <a:latin typeface="Times New Roman"/>
                 <a:cs typeface="Times New Roman"/>
               </a:rPr>
-              <a:t>On the original UNSW-NB15 release, </a:t>
-            </a:r>
-            <a:r>
-              <a:rPr lang="en-US" sz="2400" b="1" i="0" dirty="0">
-                <a:solidFill>
-                  <a:srgbClr val="1E2A32"/>
-                </a:solidFill>
-                <a:latin typeface="Times New Roman"/>
-                <a:cs typeface="Times New Roman"/>
-              </a:rPr>
-              <a:t>service fields</a:t>
-            </a:r>
-            <a:r>
-              <a:rPr lang="en-US" sz="2400" b="0" i="0" dirty="0">
-                <a:solidFill>
-                  <a:srgbClr val="1E2A32"/>
-                </a:solidFill>
-                <a:latin typeface="Times New Roman"/>
-                <a:cs typeface="Times New Roman"/>
-              </a:rPr>
-              <a:t> again carried most of the predictive power, confirming the service-identity result</a:t>
-            </a:r>
-          </a:p>
-          <a:p>
-            <a:pPr marL="381000" indent="-381000" algn="l">
+              <a:t>On the original UNSW-NB15 release, service fields again carried most of the predictive power, confirming the service-identity result</a:t>
+            </a:r>
+          </a:p>
+          <a:p>
+            <a:pPr marL="381000" indent="-381000" algn="just">
               <a:lnSpc>
                 <a:spcPct val="100000"/>
               </a:lnSpc>
@@ -11970,18 +11488,273 @@
                 <a:latin typeface="Times New Roman"/>
                 <a:cs typeface="Times New Roman"/>
               </a:rPr>
-              <a:t>High scores on CIC-IDS2017 and TON_IoT come from </a:t>
-            </a:r>
-            <a:r>
-              <a:rPr lang="en-US" sz="2400" b="1" i="0" dirty="0">
+              <a:t>High scores on CIC-IDS2017 and TON_IoT come from easy testbeds, not a better model, so they cannot serve as fair second tests</a:t>
+            </a:r>
+          </a:p>
+        </p:txBody>
+      </p:sp>
+      <p:sp>
+        <p:nvSpPr>
+          <p:cNvPr id="2600" name="Section 7 Limitations"/>
+          <p:cNvSpPr/>
+          <p:nvPr/>
+        </p:nvSpPr>
+        <p:spPr>
+          <a:xfrm>
+            <a:off x="18415000" y="23111557"/>
+            <a:ext cx="8458200" cy="736600"/>
+          </a:xfrm>
+          <a:prstGeom prst="roundRect">
+            <a:avLst>
+              <a:gd name="adj" fmla="val 10000"/>
+            </a:avLst>
+          </a:prstGeom>
+          <a:solidFill>
+            <a:srgbClr val="1E3A52"/>
+          </a:solidFill>
+          <a:ln>
+            <a:noFill/>
+          </a:ln>
+        </p:spPr>
+        <p:txBody>
+          <a:bodyPr wrap="square" lIns="254000" tIns="0" rIns="254000" bIns="0" rtlCol="0" anchor="ctr">
+            <a:noAutofit/>
+          </a:bodyPr>
+          <a:lstStyle/>
+          <a:p>
+            <a:pPr marL="0" indent="0" algn="l">
+              <a:spcBef>
+                <a:spcPts val="0"/>
+              </a:spcBef>
+              <a:spcAft>
+                <a:spcPts val="0"/>
+              </a:spcAft>
+              <a:buNone/>
+            </a:pPr>
+            <a:r>
+              <a:rPr lang="en-US" sz="3200" b="1" i="0" dirty="0">
+                <a:solidFill>
+                  <a:srgbClr val="FFFFFF"/>
+                </a:solidFill>
+                <a:latin typeface="Times New Roman"/>
+                <a:cs typeface="Times New Roman"/>
+              </a:rPr>
+              <a:t>7   LIMITATIONS &amp; FUTURE WORK</a:t>
+            </a:r>
+          </a:p>
+        </p:txBody>
+      </p:sp>
+      <p:sp>
+        <p:nvSpPr>
+          <p:cNvPr id="2605" name="Section 5 continued"/>
+          <p:cNvSpPr/>
+          <p:nvPr/>
+        </p:nvSpPr>
+        <p:spPr>
+          <a:xfrm>
+            <a:off x="18415000" y="4318000"/>
+            <a:ext cx="8458200" cy="736600"/>
+          </a:xfrm>
+          <a:prstGeom prst="roundRect">
+            <a:avLst>
+              <a:gd name="adj" fmla="val 10000"/>
+            </a:avLst>
+          </a:prstGeom>
+          <a:solidFill>
+            <a:srgbClr val="1E3A52"/>
+          </a:solidFill>
+          <a:ln>
+            <a:noFill/>
+          </a:ln>
+        </p:spPr>
+        <p:txBody>
+          <a:bodyPr wrap="square" lIns="254000" tIns="0" rIns="254000" bIns="0" rtlCol="0" anchor="ctr">
+            <a:noAutofit/>
+          </a:bodyPr>
+          <a:lstStyle/>
+          <a:p>
+            <a:pPr marL="0" indent="0" algn="l">
+              <a:lnSpc>
+                <a:spcPct val="100000"/>
+              </a:lnSpc>
+              <a:spcBef>
+                <a:spcPts val="0"/>
+              </a:spcBef>
+              <a:spcAft>
+                <a:spcPts val="0"/>
+              </a:spcAft>
+              <a:buNone/>
+            </a:pPr>
+            <a:r>
+              <a:rPr lang="en-US" sz="3200" b="1" i="0" dirty="0">
+                <a:solidFill>
+                  <a:srgbClr val="FFFFFF"/>
+                </a:solidFill>
+                <a:latin typeface="Times New Roman"/>
+                <a:cs typeface="Times New Roman"/>
+              </a:rPr>
+              <a:t>5   RESULTS (CONTINUED)</a:t>
+            </a:r>
+          </a:p>
+        </p:txBody>
+      </p:sp>
+      <p:sp>
+        <p:nvSpPr>
+          <p:cNvPr id="2601" name="Limitations head"/>
+          <p:cNvSpPr txBox="1"/>
+          <p:nvPr/>
+        </p:nvSpPr>
+        <p:spPr>
+          <a:xfrm>
+            <a:off x="18415000" y="24076757"/>
+            <a:ext cx="4127500" cy="461665"/>
+          </a:xfrm>
+          <a:prstGeom prst="rect">
+            <a:avLst/>
+          </a:prstGeom>
+          <a:noFill/>
+          <a:ln>
+            <a:noFill/>
+          </a:ln>
+        </p:spPr>
+        <p:txBody>
+          <a:bodyPr wrap="square" lIns="0" tIns="0" rIns="0" bIns="0" rtlCol="0" anchor="t">
+            <a:spAutoFit/>
+          </a:bodyPr>
+          <a:lstStyle/>
+          <a:p>
+            <a:pPr marL="0" indent="0" algn="l">
+              <a:spcBef>
+                <a:spcPts val="0"/>
+              </a:spcBef>
+              <a:spcAft>
+                <a:spcPts val="0"/>
+              </a:spcAft>
+              <a:buNone/>
+            </a:pPr>
+            <a:r>
+              <a:rPr lang="en-US" sz="3000" b="1" i="0" dirty="0">
+                <a:solidFill>
+                  <a:srgbClr val="1E3A52"/>
+                </a:solidFill>
+                <a:latin typeface="Times New Roman"/>
+                <a:cs typeface="Times New Roman"/>
+              </a:rPr>
+              <a:t>Limitations</a:t>
+            </a:r>
+          </a:p>
+        </p:txBody>
+      </p:sp>
+      <p:sp>
+        <p:nvSpPr>
+          <p:cNvPr id="2603" name="Future work head"/>
+          <p:cNvSpPr txBox="1"/>
+          <p:nvPr/>
+        </p:nvSpPr>
+        <p:spPr>
+          <a:xfrm>
+            <a:off x="22745700" y="24076757"/>
+            <a:ext cx="4127500" cy="461665"/>
+          </a:xfrm>
+          <a:prstGeom prst="rect">
+            <a:avLst/>
+          </a:prstGeom>
+          <a:noFill/>
+          <a:ln>
+            <a:noFill/>
+          </a:ln>
+        </p:spPr>
+        <p:txBody>
+          <a:bodyPr wrap="square" lIns="0" tIns="0" rIns="0" bIns="0" rtlCol="0" anchor="t">
+            <a:spAutoFit/>
+          </a:bodyPr>
+          <a:lstStyle/>
+          <a:p>
+            <a:pPr marL="0" indent="0" algn="l">
+              <a:spcBef>
+                <a:spcPts val="0"/>
+              </a:spcBef>
+              <a:spcAft>
+                <a:spcPts val="0"/>
+              </a:spcAft>
+              <a:buNone/>
+            </a:pPr>
+            <a:r>
+              <a:rPr lang="en-US" sz="3000" b="1" i="0" dirty="0">
+                <a:solidFill>
+                  <a:srgbClr val="1E3A52"/>
+                </a:solidFill>
+                <a:latin typeface="Times New Roman"/>
+                <a:cs typeface="Times New Roman"/>
+              </a:rPr>
+              <a:t>Future Work</a:t>
+            </a:r>
+          </a:p>
+        </p:txBody>
+      </p:sp>
+      <p:sp>
+        <p:nvSpPr>
+          <p:cNvPr id="2602" name="Limitations bullets"/>
+          <p:cNvSpPr txBox="1"/>
+          <p:nvPr/>
+        </p:nvSpPr>
+        <p:spPr>
+          <a:xfrm>
+            <a:off x="18415000" y="24640022"/>
+            <a:ext cx="4127500" cy="2739211"/>
+          </a:xfrm>
+          <a:prstGeom prst="rect">
+            <a:avLst/>
+          </a:prstGeom>
+          <a:noFill/>
+          <a:ln>
+            <a:noFill/>
+          </a:ln>
+        </p:spPr>
+        <p:txBody>
+          <a:bodyPr wrap="square" lIns="0" tIns="0" rIns="0" bIns="0" rtlCol="0" anchor="t">
+            <a:spAutoFit/>
+          </a:bodyPr>
+          <a:lstStyle/>
+          <a:p>
+            <a:pPr marL="381000" indent="-381000" algn="l">
+              <a:spcBef>
+                <a:spcPts val="0"/>
+              </a:spcBef>
+              <a:spcAft>
+                <a:spcPts val="600"/>
+              </a:spcAft>
+              <a:buClr>
+                <a:srgbClr val="D98E45"/>
+              </a:buClr>
+              <a:buFont typeface="Arial"/>
+              <a:buChar char="▪"/>
+            </a:pPr>
+            <a:r>
+              <a:rPr lang="en-US" sz="2400" b="0" i="0" dirty="0">
                 <a:solidFill>
                   <a:srgbClr val="1E2A32"/>
                 </a:solidFill>
                 <a:latin typeface="Times New Roman"/>
                 <a:cs typeface="Times New Roman"/>
               </a:rPr>
-              <a:t>easy testbeds</a:t>
-            </a:r>
+              <a:t>One main testbed; the other datasets are too easy</a:t>
+            </a:r>
+          </a:p>
+          <a:p>
+            <a:pPr marL="381000" indent="-381000" algn="l">
+              <a:spcBef>
+                <a:spcPts val="0"/>
+              </a:spcBef>
+              <a:spcAft>
+                <a:spcPts val="600"/>
+              </a:spcAft>
+              <a:buClr>
+                <a:srgbClr val="D98E45"/>
+              </a:buClr>
+              <a:buFont typeface="Arial"/>
+              <a:buChar char="▪"/>
+            </a:pPr>
             <a:r>
               <a:rPr lang="en-US" sz="2400" b="0" i="0" dirty="0">
                 <a:solidFill>
@@ -11990,7 +11763,133 @@
                 <a:latin typeface="Times New Roman"/>
                 <a:cs typeface="Times New Roman"/>
               </a:rPr>
-              <a:t>, not a better model, so they cannot serve as fair second tests</a:t>
+              <a:t>Flow statistics only, no packet payloads</a:t>
+            </a:r>
+          </a:p>
+          <a:p>
+            <a:pPr marL="381000" indent="-381000" algn="l">
+              <a:spcBef>
+                <a:spcPts val="0"/>
+              </a:spcBef>
+              <a:spcAft>
+                <a:spcPts val="0"/>
+              </a:spcAft>
+              <a:buClr>
+                <a:srgbClr val="D98E45"/>
+              </a:buClr>
+              <a:buFont typeface="Arial"/>
+              <a:buChar char="▪"/>
+            </a:pPr>
+            <a:r>
+              <a:rPr lang="en-US" sz="2400" b="0" i="0" dirty="0">
+                <a:solidFill>
+                  <a:srgbClr val="1E2A32"/>
+                </a:solidFill>
+                <a:latin typeface="Times New Roman"/>
+                <a:cs typeface="Times New Roman"/>
+              </a:rPr>
+              <a:t>Analysis (F1 0.161) and Worms (F1 0.574) remain weak</a:t>
+            </a:r>
+          </a:p>
+        </p:txBody>
+      </p:sp>
+      <p:sp>
+        <p:nvSpPr>
+          <p:cNvPr id="2604" name="Future work bullets"/>
+          <p:cNvSpPr txBox="1"/>
+          <p:nvPr/>
+        </p:nvSpPr>
+        <p:spPr>
+          <a:xfrm>
+            <a:off x="22745700" y="24640022"/>
+            <a:ext cx="4127500" cy="2369880"/>
+          </a:xfrm>
+          <a:prstGeom prst="rect">
+            <a:avLst/>
+          </a:prstGeom>
+          <a:noFill/>
+          <a:ln>
+            <a:noFill/>
+          </a:ln>
+        </p:spPr>
+        <p:txBody>
+          <a:bodyPr wrap="square" lIns="0" tIns="0" rIns="0" bIns="0" rtlCol="0" anchor="t">
+            <a:spAutoFit/>
+          </a:bodyPr>
+          <a:lstStyle/>
+          <a:p>
+            <a:pPr marL="381000" indent="-381000" algn="l">
+              <a:spcBef>
+                <a:spcPts val="0"/>
+              </a:spcBef>
+              <a:spcAft>
+                <a:spcPts val="600"/>
+              </a:spcAft>
+              <a:buClr>
+                <a:srgbClr val="D98E45"/>
+              </a:buClr>
+              <a:buFont typeface="Arial"/>
+              <a:buChar char="▪"/>
+            </a:pPr>
+            <a:r>
+              <a:rPr lang="en-US" sz="2400" b="0" i="0" dirty="0">
+                <a:solidFill>
+                  <a:srgbClr val="1E2A32"/>
+                </a:solidFill>
+                <a:latin typeface="Times New Roman"/>
+                <a:cs typeface="Times New Roman"/>
+              </a:rPr>
+              <a:t>Payload features for families that flows cannot separate</a:t>
+            </a:r>
+          </a:p>
+          <a:p>
+            <a:pPr marL="381000" indent="-381000" algn="l">
+              <a:spcBef>
+                <a:spcPts val="0"/>
+              </a:spcBef>
+              <a:spcAft>
+                <a:spcPts val="600"/>
+              </a:spcAft>
+              <a:buClr>
+                <a:srgbClr val="D98E45"/>
+              </a:buClr>
+              <a:buFont typeface="Arial"/>
+              <a:buChar char="▪"/>
+            </a:pPr>
+            <a:r>
+              <a:rPr lang="en-US" sz="2400" b="0" i="0" dirty="0">
+                <a:solidFill>
+                  <a:srgbClr val="1E2A32"/>
+                </a:solidFill>
+                <a:latin typeface="Times New Roman"/>
+                <a:cs typeface="Times New Roman"/>
+              </a:rPr>
+              <a:t>Train on one network, test on another</a:t>
+            </a:r>
+          </a:p>
+          <a:p>
+            <a:pPr marL="381000" indent="-381000" algn="l">
+              <a:spcBef>
+                <a:spcPts val="0"/>
+              </a:spcBef>
+              <a:spcAft>
+                <a:spcPts val="0"/>
+              </a:spcAft>
+              <a:buClr>
+                <a:srgbClr val="D98E45"/>
+              </a:buClr>
+              <a:buFont typeface="Arial"/>
+              <a:buChar char="▪"/>
+            </a:pPr>
+            <a:r>
+              <a:rPr lang="en-US" sz="2400" b="0" i="0" dirty="0">
+                <a:solidFill>
+                  <a:srgbClr val="1E2A32"/>
+                </a:solidFill>
+                <a:latin typeface="Times New Roman"/>
+                <a:cs typeface="Times New Roman"/>
+              </a:rPr>
+              <a:t>SHAP explanations and adversarial training</a:t>
             </a:r>
           </a:p>
         </p:txBody>
@@ -11998,7 +11897,7 @@
     </p:spTree>
     <p:extLst>
       <p:ext uri="{BB962C8B-B14F-4D97-AF65-F5344CB8AC3E}">
-        <p14:creationId xmlns:p14="http://schemas.microsoft.com/office/powerpoint/2010/main" val="1017102066"/>
+        <p14:creationId xmlns:p14="http://schemas.microsoft.com/office/powerpoint/2010/main" val="3068991968"/>
       </p:ext>
     </p:extLst>
   </p:cSld>
